--- a/Base_Model/LLM/论文插图.pptx
+++ b/Base_Model/LLM/论文插图.pptx
@@ -8,7 +8,7 @@
     <p:notesMasterId r:id="rId4"/>
   </p:notesMasterIdLst>
   <p:handoutMasterIdLst>
-    <p:handoutMasterId r:id="rId10"/>
+    <p:handoutMasterId r:id="rId20"/>
   </p:handoutMasterIdLst>
   <p:sldIdLst>
     <p:sldId id="256" r:id="rId3"/>
@@ -17,6 +17,16 @@
     <p:sldId id="259" r:id="rId7"/>
     <p:sldId id="260" r:id="rId8"/>
     <p:sldId id="261" r:id="rId9"/>
+    <p:sldId id="262" r:id="rId10"/>
+    <p:sldId id="263" r:id="rId11"/>
+    <p:sldId id="264" r:id="rId12"/>
+    <p:sldId id="265" r:id="rId13"/>
+    <p:sldId id="266" r:id="rId14"/>
+    <p:sldId id="267" r:id="rId15"/>
+    <p:sldId id="268" r:id="rId16"/>
+    <p:sldId id="269" r:id="rId17"/>
+    <p:sldId id="270" r:id="rId18"/>
+    <p:sldId id="271" r:id="rId19"/>
   </p:sldIdLst>
   <p:sldSz cx="12192000" cy="6858000"/>
   <p:notesSz cx="7103745" cy="10234295"/>
@@ -118,12 +128,12 @@
   <p:extLst>
     <p:ext uri="{EFAFB233-063F-42B5-8137-9DF3F51BA10A}">
       <p15:sldGuideLst xmlns:p15="http://schemas.microsoft.com/office/powerpoint/2012/main">
-        <p15:guide id="1" orient="horz" pos="2117" userDrawn="1">
+        <p15:guide id="1" orient="horz" pos="2090" userDrawn="1">
           <p15:clr>
             <a:srgbClr val="A4A3A4"/>
           </p15:clr>
         </p15:guide>
-        <p15:guide id="2" pos="3840" userDrawn="1">
+        <p15:guide id="2" pos="3854" userDrawn="1">
           <p15:clr>
             <a:srgbClr val="A4A3A4"/>
           </p15:clr>
@@ -3577,6 +3587,1686 @@
 </p:sld>
 </file>
 
+<file path=ppt/slides/slide10.xml><?xml version="1.0" encoding="utf-8"?>
+<p:sld xmlns:a="http://schemas.openxmlformats.org/drawingml/2006/main" xmlns:r="http://schemas.openxmlformats.org/officeDocument/2006/relationships" xmlns:p="http://schemas.openxmlformats.org/presentationml/2006/main">
+  <p:cSld>
+    <p:spTree>
+      <p:nvGrpSpPr>
+        <p:cNvPr id="1" name=""/>
+        <p:cNvGrpSpPr/>
+        <p:nvPr/>
+      </p:nvGrpSpPr>
+      <p:grpSpPr/>
+      <p:pic>
+        <p:nvPicPr>
+          <p:cNvPr id="4" name="图片 3"/>
+          <p:cNvPicPr>
+            <a:picLocks noChangeAspect="1"/>
+          </p:cNvPicPr>
+          <p:nvPr>
+            <p:custDataLst>
+              <p:tags r:id="rId1"/>
+            </p:custDataLst>
+          </p:nvPr>
+        </p:nvPicPr>
+        <p:blipFill>
+          <a:blip r:embed="rId2"/>
+          <a:stretch>
+            <a:fillRect/>
+          </a:stretch>
+        </p:blipFill>
+        <p:spPr>
+          <a:xfrm>
+            <a:off x="180975" y="1807210"/>
+            <a:ext cx="1961515" cy="4942840"/>
+          </a:xfrm>
+          <a:prstGeom prst="rect">
+            <a:avLst/>
+          </a:prstGeom>
+        </p:spPr>
+      </p:pic>
+      <p:pic>
+        <p:nvPicPr>
+          <p:cNvPr id="5" name="图片 4"/>
+          <p:cNvPicPr>
+            <a:picLocks noChangeAspect="1"/>
+          </p:cNvPicPr>
+          <p:nvPr>
+            <p:custDataLst>
+              <p:tags r:id="rId3"/>
+            </p:custDataLst>
+          </p:nvPr>
+        </p:nvPicPr>
+        <p:blipFill>
+          <a:blip r:embed="rId4"/>
+          <a:stretch>
+            <a:fillRect/>
+          </a:stretch>
+        </p:blipFill>
+        <p:spPr>
+          <a:xfrm>
+            <a:off x="5300345" y="120015"/>
+            <a:ext cx="1701165" cy="4725670"/>
+          </a:xfrm>
+          <a:prstGeom prst="rect">
+            <a:avLst/>
+          </a:prstGeom>
+        </p:spPr>
+      </p:pic>
+      <p:pic>
+        <p:nvPicPr>
+          <p:cNvPr id="6" name="图片 5"/>
+          <p:cNvPicPr>
+            <a:picLocks noChangeAspect="1"/>
+          </p:cNvPicPr>
+          <p:nvPr>
+            <p:custDataLst>
+              <p:tags r:id="rId5"/>
+            </p:custDataLst>
+          </p:nvPr>
+        </p:nvPicPr>
+        <p:blipFill>
+          <a:blip r:embed="rId6"/>
+          <a:stretch>
+            <a:fillRect/>
+          </a:stretch>
+        </p:blipFill>
+        <p:spPr>
+          <a:xfrm>
+            <a:off x="5186680" y="5114925"/>
+            <a:ext cx="1818640" cy="1527810"/>
+          </a:xfrm>
+          <a:prstGeom prst="rect">
+            <a:avLst/>
+          </a:prstGeom>
+        </p:spPr>
+      </p:pic>
+      <p:pic>
+        <p:nvPicPr>
+          <p:cNvPr id="7" name="图片 6"/>
+          <p:cNvPicPr>
+            <a:picLocks noChangeAspect="1"/>
+          </p:cNvPicPr>
+          <p:nvPr>
+            <p:custDataLst>
+              <p:tags r:id="rId7"/>
+            </p:custDataLst>
+          </p:nvPr>
+        </p:nvPicPr>
+        <p:blipFill>
+          <a:blip r:embed="rId8"/>
+          <a:stretch>
+            <a:fillRect/>
+          </a:stretch>
+        </p:blipFill>
+        <p:spPr>
+          <a:xfrm>
+            <a:off x="464820" y="153035"/>
+            <a:ext cx="1526540" cy="1548130"/>
+          </a:xfrm>
+          <a:prstGeom prst="rect">
+            <a:avLst/>
+          </a:prstGeom>
+        </p:spPr>
+      </p:pic>
+      <p:sp>
+        <p:nvSpPr>
+          <p:cNvPr id="8" name="文本框 7"/>
+          <p:cNvSpPr txBox="1"/>
+          <p:nvPr>
+            <p:custDataLst>
+              <p:tags r:id="rId9"/>
+            </p:custDataLst>
+          </p:nvPr>
+        </p:nvSpPr>
+        <p:spPr>
+          <a:xfrm>
+            <a:off x="1991360" y="652780"/>
+            <a:ext cx="3195320" cy="548640"/>
+          </a:xfrm>
+          <a:prstGeom prst="rect">
+            <a:avLst/>
+          </a:prstGeom>
+          <a:noFill/>
+        </p:spPr>
+        <p:txBody>
+          <a:bodyPr wrap="square" rtlCol="0">
+            <a:noAutofit/>
+          </a:bodyPr>
+          <a:p>
+            <a:pPr algn="ctr"/>
+            <a:r>
+              <a:rPr lang="zh-CN" altLang="en-US" sz="1400" b="1">
+                <a:latin typeface="微软雅黑" charset="0"/>
+                <a:ea typeface="微软雅黑" charset="0"/>
+                <a:cs typeface="微软雅黑" charset="0"/>
+              </a:rPr>
+              <a:t>初始的</a:t>
+            </a:r>
+            <a:r>
+              <a:rPr lang="en-US" altLang="zh-CN" sz="1400" b="1">
+                <a:latin typeface="微软雅黑" charset="0"/>
+                <a:ea typeface="微软雅黑" charset="0"/>
+                <a:cs typeface="微软雅黑" charset="0"/>
+              </a:rPr>
+              <a:t>GPT-3</a:t>
+            </a:r>
+            <a:r>
+              <a:rPr lang="zh-CN" altLang="en-US" sz="1400" b="1">
+                <a:latin typeface="微软雅黑" charset="0"/>
+                <a:ea typeface="微软雅黑" charset="0"/>
+                <a:cs typeface="微软雅黑" charset="0"/>
+              </a:rPr>
+              <a:t>存在</a:t>
+            </a:r>
+            <a:br>
+              <a:rPr lang="zh-CN" altLang="en-US" sz="1400" b="1">
+                <a:latin typeface="微软雅黑" charset="0"/>
+                <a:ea typeface="微软雅黑" charset="0"/>
+                <a:cs typeface="微软雅黑" charset="0"/>
+              </a:rPr>
+            </a:br>
+            <a:r>
+              <a:rPr lang="zh-CN" altLang="en-US" sz="1400" b="1">
+                <a:latin typeface="微软雅黑" charset="0"/>
+                <a:ea typeface="微软雅黑" charset="0"/>
+                <a:cs typeface="微软雅黑" charset="0"/>
+              </a:rPr>
+              <a:t>回答不符合预期，风格混乱等</a:t>
+            </a:r>
+            <a:r>
+              <a:rPr lang="zh-CN" altLang="en-US" sz="1400" b="1">
+                <a:latin typeface="微软雅黑" charset="0"/>
+                <a:ea typeface="微软雅黑" charset="0"/>
+                <a:cs typeface="微软雅黑" charset="0"/>
+              </a:rPr>
+              <a:t>问题</a:t>
+            </a:r>
+            <a:endParaRPr lang="zh-CN" altLang="en-US" sz="1400" b="1">
+              <a:latin typeface="微软雅黑" charset="0"/>
+              <a:ea typeface="微软雅黑" charset="0"/>
+              <a:cs typeface="微软雅黑" charset="0"/>
+            </a:endParaRPr>
+          </a:p>
+        </p:txBody>
+      </p:sp>
+      <p:sp>
+        <p:nvSpPr>
+          <p:cNvPr id="9" name="文本框 8"/>
+          <p:cNvSpPr txBox="1"/>
+          <p:nvPr>
+            <p:custDataLst>
+              <p:tags r:id="rId10"/>
+            </p:custDataLst>
+          </p:nvPr>
+        </p:nvSpPr>
+        <p:spPr>
+          <a:xfrm>
+            <a:off x="1878330" y="3154680"/>
+            <a:ext cx="3195320" cy="548640"/>
+          </a:xfrm>
+          <a:prstGeom prst="rect">
+            <a:avLst/>
+          </a:prstGeom>
+          <a:noFill/>
+        </p:spPr>
+        <p:txBody>
+          <a:bodyPr wrap="square" rtlCol="0">
+            <a:noAutofit/>
+          </a:bodyPr>
+          <a:p>
+            <a:pPr algn="ctr"/>
+            <a:r>
+              <a:rPr lang="zh-CN" altLang="en-US" sz="1400" b="1">
+                <a:latin typeface="微软雅黑" charset="0"/>
+                <a:ea typeface="微软雅黑" charset="0"/>
+                <a:cs typeface="微软雅黑" charset="0"/>
+              </a:rPr>
+              <a:t>通过人工来回答问题所构建的数据集</a:t>
+            </a:r>
+            <a:br>
+              <a:rPr lang="zh-CN" altLang="en-US" sz="1400" b="1">
+                <a:latin typeface="微软雅黑" charset="0"/>
+                <a:ea typeface="微软雅黑" charset="0"/>
+                <a:cs typeface="微软雅黑" charset="0"/>
+              </a:rPr>
+            </a:br>
+            <a:r>
+              <a:rPr lang="zh-CN" altLang="en-US" sz="1400" b="1">
+                <a:latin typeface="微软雅黑" charset="0"/>
+                <a:ea typeface="微软雅黑" charset="0"/>
+                <a:cs typeface="微软雅黑" charset="0"/>
+              </a:rPr>
+              <a:t>微调</a:t>
+            </a:r>
+            <a:r>
+              <a:rPr lang="en-US" altLang="zh-CN" sz="1400" b="1">
+                <a:latin typeface="微软雅黑" charset="0"/>
+                <a:ea typeface="微软雅黑" charset="0"/>
+                <a:cs typeface="微软雅黑" charset="0"/>
+              </a:rPr>
+              <a:t>GPT-3</a:t>
+            </a:r>
+            <a:endParaRPr lang="zh-CN" altLang="en-US" sz="1400" b="1">
+              <a:latin typeface="微软雅黑" charset="0"/>
+              <a:ea typeface="微软雅黑" charset="0"/>
+              <a:cs typeface="微软雅黑" charset="0"/>
+            </a:endParaRPr>
+          </a:p>
+        </p:txBody>
+      </p:sp>
+      <p:sp>
+        <p:nvSpPr>
+          <p:cNvPr id="10" name="文本框 9"/>
+          <p:cNvSpPr txBox="1"/>
+          <p:nvPr>
+            <p:custDataLst>
+              <p:tags r:id="rId11"/>
+            </p:custDataLst>
+          </p:nvPr>
+        </p:nvSpPr>
+        <p:spPr>
+          <a:xfrm>
+            <a:off x="1651000" y="5529580"/>
+            <a:ext cx="3422650" cy="548640"/>
+          </a:xfrm>
+          <a:prstGeom prst="rect">
+            <a:avLst/>
+          </a:prstGeom>
+          <a:noFill/>
+        </p:spPr>
+        <p:txBody>
+          <a:bodyPr wrap="square" rtlCol="0">
+            <a:noAutofit/>
+          </a:bodyPr>
+          <a:p>
+            <a:pPr algn="ctr"/>
+            <a:r>
+              <a:rPr lang="zh-CN" altLang="en-US" sz="1400" b="1">
+                <a:latin typeface="微软雅黑" charset="0"/>
+                <a:ea typeface="微软雅黑" charset="0"/>
+                <a:cs typeface="微软雅黑" charset="0"/>
+                <a:sym typeface="+mn-ea"/>
+              </a:rPr>
+              <a:t>初步具有良好的生成能力的微调</a:t>
+            </a:r>
+            <a:r>
+              <a:rPr lang="en-US" altLang="zh-CN" sz="1400" b="1">
+                <a:latin typeface="微软雅黑" charset="0"/>
+                <a:ea typeface="微软雅黑" charset="0"/>
+                <a:cs typeface="微软雅黑" charset="0"/>
+                <a:sym typeface="+mn-ea"/>
+              </a:rPr>
+              <a:t>GPT-3</a:t>
+            </a:r>
+            <a:endParaRPr lang="en-US" altLang="zh-CN" sz="1400" b="1">
+              <a:latin typeface="微软雅黑" charset="0"/>
+              <a:ea typeface="微软雅黑" charset="0"/>
+              <a:cs typeface="微软雅黑" charset="0"/>
+              <a:sym typeface="+mn-ea"/>
+            </a:endParaRPr>
+          </a:p>
+        </p:txBody>
+      </p:sp>
+      <p:sp>
+        <p:nvSpPr>
+          <p:cNvPr id="11" name="文本框 10"/>
+          <p:cNvSpPr txBox="1"/>
+          <p:nvPr>
+            <p:custDataLst>
+              <p:tags r:id="rId12"/>
+            </p:custDataLst>
+          </p:nvPr>
+        </p:nvSpPr>
+        <p:spPr>
+          <a:xfrm>
+            <a:off x="7115175" y="2315210"/>
+            <a:ext cx="3422650" cy="548640"/>
+          </a:xfrm>
+          <a:prstGeom prst="rect">
+            <a:avLst/>
+          </a:prstGeom>
+          <a:noFill/>
+        </p:spPr>
+        <p:txBody>
+          <a:bodyPr wrap="square" rtlCol="0">
+            <a:noAutofit/>
+          </a:bodyPr>
+          <a:p>
+            <a:pPr algn="ctr"/>
+            <a:r>
+              <a:rPr lang="zh-CN" altLang="en-US" sz="1400" b="1">
+                <a:latin typeface="微软雅黑" charset="0"/>
+                <a:ea typeface="微软雅黑" charset="0"/>
+                <a:cs typeface="微软雅黑" charset="0"/>
+              </a:rPr>
+              <a:t>通过人工对微调</a:t>
+            </a:r>
+            <a:r>
+              <a:rPr lang="en-US" altLang="zh-CN" sz="1400" b="1">
+                <a:latin typeface="微软雅黑" charset="0"/>
+                <a:ea typeface="微软雅黑" charset="0"/>
+                <a:cs typeface="微软雅黑" charset="0"/>
+              </a:rPr>
+              <a:t>GPT-3</a:t>
+            </a:r>
+            <a:r>
+              <a:rPr lang="zh-CN" altLang="en-US" sz="1400" b="1">
+                <a:latin typeface="微软雅黑" charset="0"/>
+                <a:ea typeface="微软雅黑" charset="0"/>
+                <a:cs typeface="微软雅黑" charset="0"/>
+              </a:rPr>
+              <a:t>生成的多个结果进行排序，来训练一个全新的强化学习</a:t>
+            </a:r>
+            <a:r>
+              <a:rPr lang="zh-CN" altLang="en-US" sz="1400" b="1">
+                <a:latin typeface="微软雅黑" charset="0"/>
+                <a:ea typeface="微软雅黑" charset="0"/>
+                <a:cs typeface="微软雅黑" charset="0"/>
+              </a:rPr>
+              <a:t>网络</a:t>
+            </a:r>
+            <a:endParaRPr lang="zh-CN" altLang="en-US" sz="1400" b="1">
+              <a:latin typeface="微软雅黑" charset="0"/>
+              <a:ea typeface="微软雅黑" charset="0"/>
+              <a:cs typeface="微软雅黑" charset="0"/>
+            </a:endParaRPr>
+          </a:p>
+        </p:txBody>
+      </p:sp>
+      <p:sp>
+        <p:nvSpPr>
+          <p:cNvPr id="12" name="文本框 11"/>
+          <p:cNvSpPr txBox="1"/>
+          <p:nvPr>
+            <p:custDataLst>
+              <p:tags r:id="rId13"/>
+            </p:custDataLst>
+          </p:nvPr>
+        </p:nvSpPr>
+        <p:spPr>
+          <a:xfrm>
+            <a:off x="7001510" y="5251450"/>
+            <a:ext cx="4606290" cy="548640"/>
+          </a:xfrm>
+          <a:prstGeom prst="rect">
+            <a:avLst/>
+          </a:prstGeom>
+          <a:noFill/>
+        </p:spPr>
+        <p:txBody>
+          <a:bodyPr wrap="square" rtlCol="0">
+            <a:noAutofit/>
+          </a:bodyPr>
+          <a:p>
+            <a:pPr algn="ctr"/>
+            <a:r>
+              <a:rPr lang="zh-CN" altLang="en-US" sz="1400" b="1">
+                <a:latin typeface="微软雅黑" charset="0"/>
+                <a:ea typeface="微软雅黑" charset="0"/>
+                <a:cs typeface="微软雅黑" charset="0"/>
+              </a:rPr>
+              <a:t>使用新学习的强化学习网络来对微调后的</a:t>
+            </a:r>
+            <a:r>
+              <a:rPr lang="en-US" altLang="zh-CN" sz="1400" b="1">
+                <a:latin typeface="微软雅黑" charset="0"/>
+                <a:ea typeface="微软雅黑" charset="0"/>
+                <a:cs typeface="微软雅黑" charset="0"/>
+              </a:rPr>
+              <a:t>GPT-3</a:t>
+            </a:r>
+            <a:r>
+              <a:rPr lang="zh-CN" altLang="en-US" sz="1400" b="1">
+                <a:latin typeface="微软雅黑" charset="0"/>
+                <a:ea typeface="微软雅黑" charset="0"/>
+                <a:cs typeface="微软雅黑" charset="0"/>
+              </a:rPr>
+              <a:t>评分</a:t>
+            </a:r>
+            <a:br>
+              <a:rPr lang="zh-CN" altLang="en-US" sz="1400" b="1">
+                <a:latin typeface="微软雅黑" charset="0"/>
+                <a:ea typeface="微软雅黑" charset="0"/>
+                <a:cs typeface="微软雅黑" charset="0"/>
+              </a:rPr>
+            </a:br>
+            <a:r>
+              <a:rPr lang="zh-CN" altLang="en-US" sz="1400" b="1">
+                <a:latin typeface="微软雅黑" charset="0"/>
+                <a:ea typeface="微软雅黑" charset="0"/>
+                <a:cs typeface="微软雅黑" charset="0"/>
+              </a:rPr>
+              <a:t>根据</a:t>
+            </a:r>
+            <a:r>
+              <a:rPr lang="zh-CN" altLang="en-US" sz="1400" b="1">
+                <a:latin typeface="微软雅黑" charset="0"/>
+                <a:ea typeface="微软雅黑" charset="0"/>
+                <a:cs typeface="微软雅黑" charset="0"/>
+              </a:rPr>
+              <a:t>评分进一步指导微调</a:t>
+            </a:r>
+            <a:r>
+              <a:rPr lang="en-US" altLang="zh-CN" sz="1400" b="1">
+                <a:latin typeface="微软雅黑" charset="0"/>
+                <a:ea typeface="微软雅黑" charset="0"/>
+                <a:cs typeface="微软雅黑" charset="0"/>
+              </a:rPr>
+              <a:t>GPT-3</a:t>
+            </a:r>
+            <a:r>
+              <a:rPr lang="zh-CN" altLang="en-US" sz="1400" b="1">
+                <a:latin typeface="微软雅黑" charset="0"/>
+                <a:ea typeface="微软雅黑" charset="0"/>
+                <a:cs typeface="微软雅黑" charset="0"/>
+              </a:rPr>
+              <a:t>，进行进一步</a:t>
+            </a:r>
+            <a:r>
+              <a:rPr lang="zh-CN" altLang="en-US" sz="1400" b="1">
+                <a:latin typeface="微软雅黑" charset="0"/>
+                <a:ea typeface="微软雅黑" charset="0"/>
+                <a:cs typeface="微软雅黑" charset="0"/>
+              </a:rPr>
+              <a:t>微调</a:t>
+            </a:r>
+            <a:endParaRPr lang="zh-CN" altLang="en-US" sz="1400" b="1">
+              <a:latin typeface="微软雅黑" charset="0"/>
+              <a:ea typeface="微软雅黑" charset="0"/>
+              <a:cs typeface="微软雅黑" charset="0"/>
+            </a:endParaRPr>
+          </a:p>
+        </p:txBody>
+      </p:sp>
+      <p:sp>
+        <p:nvSpPr>
+          <p:cNvPr id="14" name="文本框 13"/>
+          <p:cNvSpPr txBox="1"/>
+          <p:nvPr>
+            <p:custDataLst>
+              <p:tags r:id="rId14"/>
+            </p:custDataLst>
+          </p:nvPr>
+        </p:nvSpPr>
+        <p:spPr>
+          <a:xfrm>
+            <a:off x="9159875" y="5800090"/>
+            <a:ext cx="3422650" cy="548640"/>
+          </a:xfrm>
+          <a:prstGeom prst="rect">
+            <a:avLst/>
+          </a:prstGeom>
+          <a:noFill/>
+        </p:spPr>
+        <p:txBody>
+          <a:bodyPr wrap="square" rtlCol="0">
+            <a:noAutofit/>
+          </a:bodyPr>
+          <a:p>
+            <a:pPr algn="ctr"/>
+            <a:r>
+              <a:rPr lang="en-US" altLang="zh-CN" sz="2800" b="1">
+                <a:latin typeface="微软雅黑" charset="0"/>
+                <a:ea typeface="微软雅黑" charset="0"/>
+                <a:cs typeface="微软雅黑" charset="0"/>
+              </a:rPr>
+              <a:t>InstructGPT</a:t>
+            </a:r>
+            <a:endParaRPr lang="en-US" altLang="zh-CN" sz="2800" b="1">
+              <a:latin typeface="微软雅黑" charset="0"/>
+              <a:ea typeface="微软雅黑" charset="0"/>
+              <a:cs typeface="微软雅黑" charset="0"/>
+            </a:endParaRPr>
+          </a:p>
+        </p:txBody>
+      </p:sp>
+      <p:sp>
+        <p:nvSpPr>
+          <p:cNvPr id="15" name="矩形: 圆角 36"/>
+          <p:cNvSpPr/>
+          <p:nvPr>
+            <p:custDataLst>
+              <p:tags r:id="rId15"/>
+            </p:custDataLst>
+          </p:nvPr>
+        </p:nvSpPr>
+        <p:spPr>
+          <a:xfrm rot="10800000" flipV="1">
+            <a:off x="180975" y="120650"/>
+            <a:ext cx="4815840" cy="1686560"/>
+          </a:xfrm>
+          <a:prstGeom prst="roundRect">
+            <a:avLst>
+              <a:gd name="adj" fmla="val 10039"/>
+            </a:avLst>
+          </a:prstGeom>
+          <a:noFill/>
+          <a:ln w="38100">
+            <a:solidFill>
+              <a:schemeClr val="tx1"/>
+            </a:solidFill>
+            <a:prstDash val="lgDash"/>
+          </a:ln>
+        </p:spPr>
+        <p:style>
+          <a:lnRef idx="2">
+            <a:schemeClr val="accent1">
+              <a:shade val="15000"/>
+            </a:schemeClr>
+          </a:lnRef>
+          <a:fillRef idx="1">
+            <a:schemeClr val="accent1"/>
+          </a:fillRef>
+          <a:effectRef idx="0">
+            <a:schemeClr val="accent1"/>
+          </a:effectRef>
+          <a:fontRef idx="minor">
+            <a:schemeClr val="lt1"/>
+          </a:fontRef>
+        </p:style>
+        <p:txBody>
+          <a:bodyPr rtlCol="0" anchor="ctr"/>
+          <a:p>
+            <a:pPr algn="ctr"/>
+            <a:endParaRPr lang="zh-CN" altLang="en-US"/>
+          </a:p>
+        </p:txBody>
+      </p:sp>
+      <p:sp>
+        <p:nvSpPr>
+          <p:cNvPr id="16" name="矩形: 圆角 36"/>
+          <p:cNvSpPr/>
+          <p:nvPr>
+            <p:custDataLst>
+              <p:tags r:id="rId16"/>
+            </p:custDataLst>
+          </p:nvPr>
+        </p:nvSpPr>
+        <p:spPr>
+          <a:xfrm rot="10800000" flipV="1">
+            <a:off x="180975" y="1912620"/>
+            <a:ext cx="4815840" cy="2889885"/>
+          </a:xfrm>
+          <a:prstGeom prst="roundRect">
+            <a:avLst>
+              <a:gd name="adj" fmla="val 10039"/>
+            </a:avLst>
+          </a:prstGeom>
+          <a:noFill/>
+          <a:ln w="38100">
+            <a:solidFill>
+              <a:schemeClr val="tx1"/>
+            </a:solidFill>
+            <a:prstDash val="lgDash"/>
+          </a:ln>
+        </p:spPr>
+        <p:style>
+          <a:lnRef idx="2">
+            <a:schemeClr val="accent1">
+              <a:shade val="15000"/>
+            </a:schemeClr>
+          </a:lnRef>
+          <a:fillRef idx="1">
+            <a:schemeClr val="accent1"/>
+          </a:fillRef>
+          <a:effectRef idx="0">
+            <a:schemeClr val="accent1"/>
+          </a:effectRef>
+          <a:fontRef idx="minor">
+            <a:schemeClr val="lt1"/>
+          </a:fontRef>
+        </p:style>
+        <p:txBody>
+          <a:bodyPr rtlCol="0" anchor="ctr"/>
+          <a:p>
+            <a:pPr algn="ctr"/>
+            <a:endParaRPr lang="zh-CN" altLang="en-US"/>
+          </a:p>
+        </p:txBody>
+      </p:sp>
+      <p:sp>
+        <p:nvSpPr>
+          <p:cNvPr id="18" name="矩形: 圆角 36"/>
+          <p:cNvSpPr/>
+          <p:nvPr>
+            <p:custDataLst>
+              <p:tags r:id="rId17"/>
+            </p:custDataLst>
+          </p:nvPr>
+        </p:nvSpPr>
+        <p:spPr>
+          <a:xfrm rot="10800000" flipV="1">
+            <a:off x="174625" y="5050790"/>
+            <a:ext cx="4815840" cy="1686560"/>
+          </a:xfrm>
+          <a:prstGeom prst="roundRect">
+            <a:avLst>
+              <a:gd name="adj" fmla="val 10039"/>
+            </a:avLst>
+          </a:prstGeom>
+          <a:noFill/>
+          <a:ln w="38100">
+            <a:solidFill>
+              <a:schemeClr val="tx1"/>
+            </a:solidFill>
+            <a:prstDash val="lgDash"/>
+          </a:ln>
+        </p:spPr>
+        <p:style>
+          <a:lnRef idx="2">
+            <a:schemeClr val="accent1">
+              <a:shade val="15000"/>
+            </a:schemeClr>
+          </a:lnRef>
+          <a:fillRef idx="1">
+            <a:schemeClr val="accent1"/>
+          </a:fillRef>
+          <a:effectRef idx="0">
+            <a:schemeClr val="accent1"/>
+          </a:effectRef>
+          <a:fontRef idx="minor">
+            <a:schemeClr val="lt1"/>
+          </a:fontRef>
+        </p:style>
+        <p:txBody>
+          <a:bodyPr rtlCol="0" anchor="ctr"/>
+          <a:p>
+            <a:pPr algn="ctr"/>
+            <a:endParaRPr lang="zh-CN" altLang="en-US"/>
+          </a:p>
+        </p:txBody>
+      </p:sp>
+      <p:sp>
+        <p:nvSpPr>
+          <p:cNvPr id="19" name="矩形: 圆角 36"/>
+          <p:cNvSpPr/>
+          <p:nvPr>
+            <p:custDataLst>
+              <p:tags r:id="rId18"/>
+            </p:custDataLst>
+          </p:nvPr>
+        </p:nvSpPr>
+        <p:spPr>
+          <a:xfrm rot="10800000" flipV="1">
+            <a:off x="5300345" y="120015"/>
+            <a:ext cx="5350510" cy="4725670"/>
+          </a:xfrm>
+          <a:prstGeom prst="roundRect">
+            <a:avLst>
+              <a:gd name="adj" fmla="val 10039"/>
+            </a:avLst>
+          </a:prstGeom>
+          <a:noFill/>
+          <a:ln w="38100">
+            <a:solidFill>
+              <a:schemeClr val="tx1"/>
+            </a:solidFill>
+            <a:prstDash val="lgDash"/>
+          </a:ln>
+        </p:spPr>
+        <p:style>
+          <a:lnRef idx="2">
+            <a:schemeClr val="accent1">
+              <a:shade val="15000"/>
+            </a:schemeClr>
+          </a:lnRef>
+          <a:fillRef idx="1">
+            <a:schemeClr val="accent1"/>
+          </a:fillRef>
+          <a:effectRef idx="0">
+            <a:schemeClr val="accent1"/>
+          </a:effectRef>
+          <a:fontRef idx="minor">
+            <a:schemeClr val="lt1"/>
+          </a:fontRef>
+        </p:style>
+        <p:txBody>
+          <a:bodyPr rtlCol="0" anchor="ctr"/>
+          <a:p>
+            <a:pPr algn="ctr"/>
+            <a:endParaRPr lang="zh-CN" altLang="en-US"/>
+          </a:p>
+        </p:txBody>
+      </p:sp>
+      <p:sp>
+        <p:nvSpPr>
+          <p:cNvPr id="20" name="右箭头 19"/>
+          <p:cNvSpPr/>
+          <p:nvPr/>
+        </p:nvSpPr>
+        <p:spPr>
+          <a:xfrm>
+            <a:off x="2143760" y="5917565"/>
+            <a:ext cx="3110230" cy="313690"/>
+          </a:xfrm>
+          <a:prstGeom prst="rightArrow">
+            <a:avLst/>
+          </a:prstGeom>
+        </p:spPr>
+        <p:style>
+          <a:lnRef idx="2">
+            <a:schemeClr val="accent1">
+              <a:lumMod val="75000"/>
+            </a:schemeClr>
+          </a:lnRef>
+          <a:fillRef idx="1">
+            <a:schemeClr val="accent1"/>
+          </a:fillRef>
+          <a:effectRef idx="0">
+            <a:srgbClr val="FFFFFF"/>
+          </a:effectRef>
+          <a:fontRef idx="minor">
+            <a:schemeClr val="lt1"/>
+          </a:fontRef>
+        </p:style>
+        <p:txBody>
+          <a:bodyPr rtlCol="0" anchor="ctr"/>
+          <a:p>
+            <a:pPr algn="ctr"/>
+            <a:endParaRPr lang="zh-CN" altLang="en-US"/>
+          </a:p>
+        </p:txBody>
+      </p:sp>
+      <p:sp>
+        <p:nvSpPr>
+          <p:cNvPr id="21" name="右箭头 20"/>
+          <p:cNvSpPr/>
+          <p:nvPr>
+            <p:custDataLst>
+              <p:tags r:id="rId19"/>
+            </p:custDataLst>
+          </p:nvPr>
+        </p:nvSpPr>
+        <p:spPr>
+          <a:xfrm>
+            <a:off x="7001510" y="5888355"/>
+            <a:ext cx="2614295" cy="313690"/>
+          </a:xfrm>
+          <a:prstGeom prst="rightArrow">
+            <a:avLst/>
+          </a:prstGeom>
+        </p:spPr>
+        <p:style>
+          <a:lnRef idx="2">
+            <a:schemeClr val="accent1">
+              <a:lumMod val="75000"/>
+            </a:schemeClr>
+          </a:lnRef>
+          <a:fillRef idx="1">
+            <a:schemeClr val="accent1"/>
+          </a:fillRef>
+          <a:effectRef idx="0">
+            <a:srgbClr val="FFFFFF"/>
+          </a:effectRef>
+          <a:fontRef idx="minor">
+            <a:schemeClr val="lt1"/>
+          </a:fontRef>
+        </p:style>
+        <p:txBody>
+          <a:bodyPr rtlCol="0" anchor="ctr"/>
+          <a:p>
+            <a:pPr algn="ctr"/>
+            <a:endParaRPr lang="zh-CN" altLang="en-US"/>
+          </a:p>
+        </p:txBody>
+      </p:sp>
+      <p:sp>
+        <p:nvSpPr>
+          <p:cNvPr id="22" name="下箭头 21"/>
+          <p:cNvSpPr/>
+          <p:nvPr/>
+        </p:nvSpPr>
+        <p:spPr>
+          <a:xfrm>
+            <a:off x="5913755" y="4650105"/>
+            <a:ext cx="457200" cy="483235"/>
+          </a:xfrm>
+          <a:prstGeom prst="downArrow">
+            <a:avLst/>
+          </a:prstGeom>
+        </p:spPr>
+        <p:style>
+          <a:lnRef idx="2">
+            <a:schemeClr val="accent1">
+              <a:lumMod val="75000"/>
+            </a:schemeClr>
+          </a:lnRef>
+          <a:fillRef idx="1">
+            <a:schemeClr val="accent1"/>
+          </a:fillRef>
+          <a:effectRef idx="0">
+            <a:srgbClr val="FFFFFF"/>
+          </a:effectRef>
+          <a:fontRef idx="minor">
+            <a:schemeClr val="lt1"/>
+          </a:fontRef>
+        </p:style>
+        <p:txBody>
+          <a:bodyPr rtlCol="0" anchor="ctr"/>
+          <a:p>
+            <a:pPr algn="ctr"/>
+            <a:endParaRPr lang="zh-CN" altLang="en-US"/>
+          </a:p>
+        </p:txBody>
+      </p:sp>
+    </p:spTree>
+  </p:cSld>
+  <p:clrMapOvr>
+    <a:masterClrMapping/>
+  </p:clrMapOvr>
+</p:sld>
+</file>
+
+<file path=ppt/slides/slide11.xml><?xml version="1.0" encoding="utf-8"?>
+<p:sld xmlns:a="http://schemas.openxmlformats.org/drawingml/2006/main" xmlns:r="http://schemas.openxmlformats.org/officeDocument/2006/relationships" xmlns:p="http://schemas.openxmlformats.org/presentationml/2006/main">
+  <p:cSld>
+    <p:spTree>
+      <p:nvGrpSpPr>
+        <p:cNvPr id="1" name=""/>
+        <p:cNvGrpSpPr/>
+        <p:nvPr/>
+      </p:nvGrpSpPr>
+      <p:grpSpPr/>
+      <p:sp>
+        <p:nvSpPr>
+          <p:cNvPr id="2" name="标题 1"/>
+          <p:cNvSpPr>
+            <a:spLocks noGrp="1"/>
+          </p:cNvSpPr>
+          <p:nvPr>
+            <p:ph type="ctrTitle"/>
+          </p:nvPr>
+        </p:nvSpPr>
+        <p:spPr/>
+        <p:txBody>
+          <a:bodyPr/>
+          <a:p>
+            <a:r>
+              <a:rPr lang="en-US" altLang="zh-CN"/>
+              <a:t>Llama-1</a:t>
+            </a:r>
+            <a:endParaRPr lang="en-US" altLang="zh-CN"/>
+          </a:p>
+        </p:txBody>
+      </p:sp>
+      <p:sp>
+        <p:nvSpPr>
+          <p:cNvPr id="3" name="副标题 2"/>
+          <p:cNvSpPr>
+            <a:spLocks noGrp="1"/>
+          </p:cNvSpPr>
+          <p:nvPr>
+            <p:ph type="subTitle" idx="1"/>
+          </p:nvPr>
+        </p:nvSpPr>
+        <p:spPr/>
+        <p:txBody>
+          <a:bodyPr/>
+          <a:p>
+            <a:endParaRPr lang="zh-CN" altLang="en-US"/>
+          </a:p>
+        </p:txBody>
+      </p:sp>
+    </p:spTree>
+  </p:cSld>
+  <p:clrMapOvr>
+    <a:masterClrMapping/>
+  </p:clrMapOvr>
+</p:sld>
+</file>
+
+<file path=ppt/slides/slide12.xml><?xml version="1.0" encoding="utf-8"?>
+<p:sld xmlns:a="http://schemas.openxmlformats.org/drawingml/2006/main" xmlns:r="http://schemas.openxmlformats.org/officeDocument/2006/relationships" xmlns:p="http://schemas.openxmlformats.org/presentationml/2006/main">
+  <p:cSld>
+    <p:spTree>
+      <p:nvGrpSpPr>
+        <p:cNvPr id="1" name=""/>
+        <p:cNvGrpSpPr/>
+        <p:nvPr/>
+      </p:nvGrpSpPr>
+      <p:grpSpPr/>
+      <p:pic>
+        <p:nvPicPr>
+          <p:cNvPr id="4" name="图片 3"/>
+          <p:cNvPicPr>
+            <a:picLocks noChangeAspect="1"/>
+          </p:cNvPicPr>
+          <p:nvPr>
+            <p:custDataLst>
+              <p:tags r:id="rId1"/>
+            </p:custDataLst>
+          </p:nvPr>
+        </p:nvPicPr>
+        <p:blipFill>
+          <a:blip r:embed="rId2"/>
+          <a:stretch>
+            <a:fillRect/>
+          </a:stretch>
+        </p:blipFill>
+        <p:spPr>
+          <a:xfrm>
+            <a:off x="114300" y="657225"/>
+            <a:ext cx="6612890" cy="3870325"/>
+          </a:xfrm>
+          <a:prstGeom prst="rect">
+            <a:avLst/>
+          </a:prstGeom>
+        </p:spPr>
+      </p:pic>
+      <p:pic>
+        <p:nvPicPr>
+          <p:cNvPr id="5" name="图片 4"/>
+          <p:cNvPicPr>
+            <a:picLocks noChangeAspect="1"/>
+          </p:cNvPicPr>
+          <p:nvPr>
+            <p:custDataLst>
+              <p:tags r:id="rId3"/>
+            </p:custDataLst>
+          </p:nvPr>
+        </p:nvPicPr>
+        <p:blipFill>
+          <a:blip r:embed="rId4"/>
+          <a:stretch>
+            <a:fillRect/>
+          </a:stretch>
+        </p:blipFill>
+        <p:spPr>
+          <a:xfrm>
+            <a:off x="0" y="4648200"/>
+            <a:ext cx="8547100" cy="2209800"/>
+          </a:xfrm>
+          <a:prstGeom prst="rect">
+            <a:avLst/>
+          </a:prstGeom>
+        </p:spPr>
+      </p:pic>
+      <p:sp>
+        <p:nvSpPr>
+          <p:cNvPr id="6" name="文本框 5"/>
+          <p:cNvSpPr txBox="1"/>
+          <p:nvPr/>
+        </p:nvSpPr>
+        <p:spPr>
+          <a:xfrm>
+            <a:off x="6894195" y="1299845"/>
+            <a:ext cx="6267450" cy="2584450"/>
+          </a:xfrm>
+          <a:prstGeom prst="rect">
+            <a:avLst/>
+          </a:prstGeom>
+          <a:noFill/>
+        </p:spPr>
+        <p:txBody>
+          <a:bodyPr wrap="square" rtlCol="0">
+            <a:spAutoFit/>
+          </a:bodyPr>
+          <a:p>
+            <a:r>
+              <a:rPr lang="en-US" altLang="zh-CN" b="1">
+                <a:latin typeface="微软雅黑" charset="0"/>
+                <a:ea typeface="微软雅黑" charset="0"/>
+                <a:cs typeface="微软雅黑" charset="0"/>
+              </a:rPr>
+              <a:t>CommonCraw</a:t>
+            </a:r>
+            <a:r>
+              <a:rPr lang="zh-CN" altLang="en-US" b="1">
+                <a:latin typeface="微软雅黑" charset="0"/>
+                <a:ea typeface="微软雅黑" charset="0"/>
+                <a:cs typeface="微软雅黑" charset="0"/>
+              </a:rPr>
+              <a:t>处理流程</a:t>
+            </a:r>
+            <a:endParaRPr lang="zh-CN" altLang="en-US" b="1">
+              <a:latin typeface="微软雅黑" charset="0"/>
+              <a:ea typeface="微软雅黑" charset="0"/>
+              <a:cs typeface="微软雅黑" charset="0"/>
+            </a:endParaRPr>
+          </a:p>
+          <a:p>
+            <a:pPr indent="457200"/>
+            <a:r>
+              <a:rPr lang="zh-CN" altLang="en-US" b="1">
+                <a:latin typeface="微软雅黑" charset="0"/>
+                <a:ea typeface="微软雅黑" charset="0"/>
+                <a:cs typeface="微软雅黑" charset="0"/>
+              </a:rPr>
+              <a:t>CCNet 去重（逐行）</a:t>
+            </a:r>
+            <a:endParaRPr lang="zh-CN" altLang="en-US" b="1">
+              <a:latin typeface="微软雅黑" charset="0"/>
+              <a:ea typeface="微软雅黑" charset="0"/>
+              <a:cs typeface="微软雅黑" charset="0"/>
+            </a:endParaRPr>
+          </a:p>
+          <a:p>
+            <a:pPr indent="457200"/>
+            <a:r>
+              <a:rPr lang="zh-CN" altLang="en-US" b="1">
+                <a:latin typeface="微软雅黑" charset="0"/>
+                <a:ea typeface="微软雅黑" charset="0"/>
+                <a:cs typeface="微软雅黑" charset="0"/>
+              </a:rPr>
+              <a:t>fastText 判断语言，仅保留英文</a:t>
+            </a:r>
+            <a:endParaRPr lang="zh-CN" altLang="en-US" b="1">
+              <a:latin typeface="微软雅黑" charset="0"/>
+              <a:ea typeface="微软雅黑" charset="0"/>
+              <a:cs typeface="微软雅黑" charset="0"/>
+            </a:endParaRPr>
+          </a:p>
+          <a:p>
+            <a:pPr indent="457200"/>
+            <a:r>
+              <a:rPr lang="zh-CN" altLang="en-US" b="1">
+                <a:latin typeface="微软雅黑" charset="0"/>
+                <a:ea typeface="微软雅黑" charset="0"/>
+                <a:cs typeface="微软雅黑" charset="0"/>
+              </a:rPr>
+              <a:t>n-gram 语言模型过滤低质量内容</a:t>
+            </a:r>
+            <a:endParaRPr lang="zh-CN" altLang="en-US" b="1">
+              <a:latin typeface="微软雅黑" charset="0"/>
+              <a:ea typeface="微软雅黑" charset="0"/>
+              <a:cs typeface="微软雅黑" charset="0"/>
+            </a:endParaRPr>
+          </a:p>
+          <a:p>
+            <a:pPr indent="457200"/>
+            <a:r>
+              <a:rPr lang="zh-CN" altLang="en-US" b="1">
+                <a:latin typeface="微软雅黑" charset="0"/>
+                <a:ea typeface="微软雅黑" charset="0"/>
+                <a:cs typeface="微软雅黑" charset="0"/>
+              </a:rPr>
+              <a:t>训练线性分类器</a:t>
+            </a:r>
+            <a:br>
+              <a:rPr lang="zh-CN" altLang="en-US" b="1">
+                <a:latin typeface="微软雅黑" charset="0"/>
+                <a:ea typeface="微软雅黑" charset="0"/>
+                <a:cs typeface="微软雅黑" charset="0"/>
+              </a:rPr>
+            </a:br>
+            <a:r>
+              <a:rPr lang="en-US" altLang="zh-CN" b="1">
+                <a:latin typeface="微软雅黑" charset="0"/>
+                <a:ea typeface="微软雅黑" charset="0"/>
+                <a:cs typeface="微软雅黑" charset="0"/>
+              </a:rPr>
+              <a:t>	</a:t>
+            </a:r>
+            <a:r>
+              <a:rPr lang="zh-CN" altLang="en-US" b="1">
+                <a:latin typeface="微软雅黑" charset="0"/>
+                <a:ea typeface="微软雅黑" charset="0"/>
+                <a:cs typeface="微软雅黑" charset="0"/>
+              </a:rPr>
+              <a:t>保留类似 Wikipedia 引用的高质量网页</a:t>
+            </a:r>
+            <a:br>
+              <a:rPr lang="zh-CN" altLang="en-US" b="1">
+                <a:latin typeface="微软雅黑" charset="0"/>
+                <a:ea typeface="微软雅黑" charset="0"/>
+                <a:cs typeface="微软雅黑" charset="0"/>
+              </a:rPr>
+            </a:br>
+            <a:r>
+              <a:rPr lang="en-US" altLang="zh-CN" b="1">
+                <a:latin typeface="微软雅黑" charset="0"/>
+                <a:ea typeface="微软雅黑" charset="0"/>
+                <a:cs typeface="微软雅黑" charset="0"/>
+              </a:rPr>
+              <a:t>C4:</a:t>
+            </a:r>
+            <a:endParaRPr lang="en-US" altLang="zh-CN" b="1">
+              <a:latin typeface="微软雅黑" charset="0"/>
+              <a:ea typeface="微软雅黑" charset="0"/>
+              <a:cs typeface="微软雅黑" charset="0"/>
+            </a:endParaRPr>
+          </a:p>
+          <a:p>
+            <a:pPr indent="457200"/>
+            <a:r>
+              <a:rPr lang="en-US" altLang="zh-CN" b="1">
+                <a:latin typeface="微软雅黑" charset="0"/>
+                <a:ea typeface="微软雅黑" charset="0"/>
+                <a:cs typeface="微软雅黑" charset="0"/>
+              </a:rPr>
+              <a:t>T5</a:t>
+            </a:r>
+            <a:r>
+              <a:rPr lang="zh-CN" altLang="en-US" b="1">
+                <a:latin typeface="微软雅黑" charset="0"/>
+                <a:ea typeface="微软雅黑" charset="0"/>
+                <a:cs typeface="微软雅黑" charset="0"/>
+              </a:rPr>
+              <a:t>训练数据集</a:t>
+            </a:r>
+            <a:endParaRPr lang="zh-CN" altLang="en-US" b="1">
+              <a:latin typeface="微软雅黑" charset="0"/>
+              <a:ea typeface="微软雅黑" charset="0"/>
+              <a:cs typeface="微软雅黑" charset="0"/>
+            </a:endParaRPr>
+          </a:p>
+          <a:p>
+            <a:pPr indent="0"/>
+            <a:endParaRPr lang="zh-CN" altLang="en-US" b="1">
+              <a:latin typeface="微软雅黑" charset="0"/>
+              <a:ea typeface="微软雅黑" charset="0"/>
+              <a:cs typeface="微软雅黑" charset="0"/>
+            </a:endParaRPr>
+          </a:p>
+        </p:txBody>
+      </p:sp>
+    </p:spTree>
+  </p:cSld>
+  <p:clrMapOvr>
+    <a:masterClrMapping/>
+  </p:clrMapOvr>
+</p:sld>
+</file>
+
+<file path=ppt/slides/slide13.xml><?xml version="1.0" encoding="utf-8"?>
+<p:sld xmlns:a="http://schemas.openxmlformats.org/drawingml/2006/main" xmlns:r="http://schemas.openxmlformats.org/officeDocument/2006/relationships" xmlns:p="http://schemas.openxmlformats.org/presentationml/2006/main">
+  <p:cSld>
+    <p:spTree>
+      <p:nvGrpSpPr>
+        <p:cNvPr id="1" name=""/>
+        <p:cNvGrpSpPr/>
+        <p:nvPr/>
+      </p:nvGrpSpPr>
+      <p:grpSpPr/>
+      <p:sp>
+        <p:nvSpPr>
+          <p:cNvPr id="2" name="标题 1"/>
+          <p:cNvSpPr>
+            <a:spLocks noGrp="1"/>
+          </p:cNvSpPr>
+          <p:nvPr>
+            <p:ph type="ctrTitle"/>
+          </p:nvPr>
+        </p:nvSpPr>
+        <p:spPr/>
+        <p:txBody>
+          <a:bodyPr/>
+          <a:p>
+            <a:r>
+              <a:rPr lang="en-US" altLang="zh-CN"/>
+              <a:t>Llama-2</a:t>
+            </a:r>
+            <a:endParaRPr lang="en-US" altLang="zh-CN"/>
+          </a:p>
+        </p:txBody>
+      </p:sp>
+      <p:sp>
+        <p:nvSpPr>
+          <p:cNvPr id="3" name="副标题 2"/>
+          <p:cNvSpPr>
+            <a:spLocks noGrp="1"/>
+          </p:cNvSpPr>
+          <p:nvPr>
+            <p:ph type="subTitle" idx="1"/>
+          </p:nvPr>
+        </p:nvSpPr>
+        <p:spPr/>
+        <p:txBody>
+          <a:bodyPr/>
+          <a:p>
+            <a:endParaRPr lang="zh-CN" altLang="en-US"/>
+          </a:p>
+        </p:txBody>
+      </p:sp>
+    </p:spTree>
+  </p:cSld>
+  <p:clrMapOvr>
+    <a:masterClrMapping/>
+  </p:clrMapOvr>
+</p:sld>
+</file>
+
+<file path=ppt/slides/slide14.xml><?xml version="1.0" encoding="utf-8"?>
+<p:sld xmlns:a="http://schemas.openxmlformats.org/drawingml/2006/main" xmlns:r="http://schemas.openxmlformats.org/officeDocument/2006/relationships" xmlns:p="http://schemas.openxmlformats.org/presentationml/2006/main">
+  <p:cSld>
+    <p:spTree>
+      <p:nvGrpSpPr>
+        <p:cNvPr id="1" name=""/>
+        <p:cNvGrpSpPr/>
+        <p:nvPr/>
+      </p:nvGrpSpPr>
+      <p:grpSpPr/>
+      <p:pic>
+        <p:nvPicPr>
+          <p:cNvPr id="4" name="图片 3"/>
+          <p:cNvPicPr>
+            <a:picLocks noChangeAspect="1"/>
+          </p:cNvPicPr>
+          <p:nvPr>
+            <p:custDataLst>
+              <p:tags r:id="rId1"/>
+            </p:custDataLst>
+          </p:nvPr>
+        </p:nvPicPr>
+        <p:blipFill>
+          <a:blip r:embed="rId2"/>
+          <a:stretch>
+            <a:fillRect/>
+          </a:stretch>
+        </p:blipFill>
+        <p:spPr>
+          <a:xfrm>
+            <a:off x="1200150" y="1898650"/>
+            <a:ext cx="9791700" cy="3060700"/>
+          </a:xfrm>
+          <a:prstGeom prst="rect">
+            <a:avLst/>
+          </a:prstGeom>
+        </p:spPr>
+      </p:pic>
+    </p:spTree>
+  </p:cSld>
+  <p:clrMapOvr>
+    <a:masterClrMapping/>
+  </p:clrMapOvr>
+</p:sld>
+</file>
+
+<file path=ppt/slides/slide15.xml><?xml version="1.0" encoding="utf-8"?>
+<p:sld xmlns:a="http://schemas.openxmlformats.org/drawingml/2006/main" xmlns:r="http://schemas.openxmlformats.org/officeDocument/2006/relationships" xmlns:p="http://schemas.openxmlformats.org/presentationml/2006/main">
+  <p:cSld>
+    <p:spTree>
+      <p:nvGrpSpPr>
+        <p:cNvPr id="1" name=""/>
+        <p:cNvGrpSpPr/>
+        <p:nvPr/>
+      </p:nvGrpSpPr>
+      <p:grpSpPr/>
+      <p:sp>
+        <p:nvSpPr>
+          <p:cNvPr id="2" name="标题 1"/>
+          <p:cNvSpPr>
+            <a:spLocks noGrp="1"/>
+          </p:cNvSpPr>
+          <p:nvPr>
+            <p:ph type="ctrTitle"/>
+          </p:nvPr>
+        </p:nvSpPr>
+        <p:spPr/>
+        <p:txBody>
+          <a:bodyPr/>
+          <a:p>
+            <a:r>
+              <a:rPr lang="en-US" altLang="zh-CN"/>
+              <a:t>Llama-3</a:t>
+            </a:r>
+            <a:endParaRPr lang="en-US" altLang="zh-CN"/>
+          </a:p>
+        </p:txBody>
+      </p:sp>
+      <p:sp>
+        <p:nvSpPr>
+          <p:cNvPr id="3" name="副标题 2"/>
+          <p:cNvSpPr>
+            <a:spLocks noGrp="1"/>
+          </p:cNvSpPr>
+          <p:nvPr>
+            <p:ph type="subTitle" idx="1"/>
+          </p:nvPr>
+        </p:nvSpPr>
+        <p:spPr/>
+        <p:txBody>
+          <a:bodyPr/>
+          <a:p>
+            <a:endParaRPr lang="zh-CN" altLang="en-US"/>
+          </a:p>
+        </p:txBody>
+      </p:sp>
+    </p:spTree>
+  </p:cSld>
+  <p:clrMapOvr>
+    <a:masterClrMapping/>
+  </p:clrMapOvr>
+</p:sld>
+</file>
+
+<file path=ppt/slides/slide16.xml><?xml version="1.0" encoding="utf-8"?>
+<p:sld xmlns:a="http://schemas.openxmlformats.org/drawingml/2006/main" xmlns:r="http://schemas.openxmlformats.org/officeDocument/2006/relationships" xmlns:p="http://schemas.openxmlformats.org/presentationml/2006/main">
+  <p:cSld>
+    <p:spTree>
+      <p:nvGrpSpPr>
+        <p:cNvPr id="1" name=""/>
+        <p:cNvGrpSpPr/>
+        <p:nvPr/>
+      </p:nvGrpSpPr>
+      <p:grpSpPr/>
+      <p:pic>
+        <p:nvPicPr>
+          <p:cNvPr id="5" name="图片 4"/>
+          <p:cNvPicPr>
+            <a:picLocks noChangeAspect="1"/>
+          </p:cNvPicPr>
+          <p:nvPr>
+            <p:custDataLst>
+              <p:tags r:id="rId1"/>
+            </p:custDataLst>
+          </p:nvPr>
+        </p:nvPicPr>
+        <p:blipFill>
+          <a:blip r:embed="rId2"/>
+          <a:stretch>
+            <a:fillRect/>
+          </a:stretch>
+        </p:blipFill>
+        <p:spPr>
+          <a:xfrm>
+            <a:off x="44450" y="9525"/>
+            <a:ext cx="12148185" cy="6617970"/>
+          </a:xfrm>
+          <a:prstGeom prst="rect">
+            <a:avLst/>
+          </a:prstGeom>
+        </p:spPr>
+      </p:pic>
+      <p:sp>
+        <p:nvSpPr>
+          <p:cNvPr id="9" name="文本框 8"/>
+          <p:cNvSpPr txBox="1"/>
+          <p:nvPr>
+            <p:custDataLst>
+              <p:tags r:id="rId3"/>
+            </p:custDataLst>
+          </p:nvPr>
+        </p:nvSpPr>
+        <p:spPr>
+          <a:xfrm>
+            <a:off x="299720" y="4716145"/>
+            <a:ext cx="3195320" cy="548640"/>
+          </a:xfrm>
+          <a:prstGeom prst="rect">
+            <a:avLst/>
+          </a:prstGeom>
+          <a:noFill/>
+        </p:spPr>
+        <p:txBody>
+          <a:bodyPr wrap="square" rtlCol="0">
+            <a:noAutofit/>
+          </a:bodyPr>
+          <a:p>
+            <a:pPr algn="ctr"/>
+            <a:r>
+              <a:rPr lang="zh-CN" altLang="en-US" sz="1400" b="1">
+                <a:latin typeface="微软雅黑" charset="0"/>
+                <a:ea typeface="微软雅黑" charset="0"/>
+                <a:cs typeface="微软雅黑" charset="0"/>
+              </a:rPr>
+              <a:t>图像输入</a:t>
+            </a:r>
+            <a:endParaRPr lang="zh-CN" altLang="en-US" sz="1400" b="1">
+              <a:latin typeface="微软雅黑" charset="0"/>
+              <a:ea typeface="微软雅黑" charset="0"/>
+              <a:cs typeface="微软雅黑" charset="0"/>
+            </a:endParaRPr>
+          </a:p>
+        </p:txBody>
+      </p:sp>
+      <p:sp>
+        <p:nvSpPr>
+          <p:cNvPr id="6" name="文本框 5"/>
+          <p:cNvSpPr txBox="1"/>
+          <p:nvPr>
+            <p:custDataLst>
+              <p:tags r:id="rId4"/>
+            </p:custDataLst>
+          </p:nvPr>
+        </p:nvSpPr>
+        <p:spPr>
+          <a:xfrm>
+            <a:off x="6625590" y="5391785"/>
+            <a:ext cx="3195320" cy="548640"/>
+          </a:xfrm>
+          <a:prstGeom prst="rect">
+            <a:avLst/>
+          </a:prstGeom>
+          <a:noFill/>
+        </p:spPr>
+        <p:txBody>
+          <a:bodyPr wrap="square" rtlCol="0">
+            <a:noAutofit/>
+          </a:bodyPr>
+          <a:p>
+            <a:pPr algn="ctr"/>
+            <a:r>
+              <a:rPr lang="zh-CN" altLang="en-US" sz="1400" b="1">
+                <a:latin typeface="微软雅黑" charset="0"/>
+                <a:ea typeface="微软雅黑" charset="0"/>
+                <a:cs typeface="微软雅黑" charset="0"/>
+              </a:rPr>
+              <a:t>主结构</a:t>
+            </a:r>
+            <a:endParaRPr lang="zh-CN" altLang="en-US" sz="1400" b="1">
+              <a:latin typeface="微软雅黑" charset="0"/>
+              <a:ea typeface="微软雅黑" charset="0"/>
+              <a:cs typeface="微软雅黑" charset="0"/>
+            </a:endParaRPr>
+          </a:p>
+        </p:txBody>
+      </p:sp>
+      <p:sp>
+        <p:nvSpPr>
+          <p:cNvPr id="7" name="文本框 6"/>
+          <p:cNvSpPr txBox="1"/>
+          <p:nvPr>
+            <p:custDataLst>
+              <p:tags r:id="rId5"/>
+            </p:custDataLst>
+          </p:nvPr>
+        </p:nvSpPr>
+        <p:spPr>
+          <a:xfrm>
+            <a:off x="9942195" y="3429000"/>
+            <a:ext cx="2043430" cy="548640"/>
+          </a:xfrm>
+          <a:prstGeom prst="rect">
+            <a:avLst/>
+          </a:prstGeom>
+          <a:noFill/>
+        </p:spPr>
+        <p:txBody>
+          <a:bodyPr wrap="square" rtlCol="0">
+            <a:noAutofit/>
+          </a:bodyPr>
+          <a:p>
+            <a:pPr algn="ctr"/>
+            <a:r>
+              <a:rPr lang="zh-CN" altLang="en-US" sz="1400" b="1">
+                <a:latin typeface="微软雅黑" charset="0"/>
+                <a:ea typeface="微软雅黑" charset="0"/>
+                <a:cs typeface="微软雅黑" charset="0"/>
+              </a:rPr>
+              <a:t>音频</a:t>
+            </a:r>
+            <a:r>
+              <a:rPr lang="zh-CN" altLang="en-US" sz="1400" b="1">
+                <a:latin typeface="微软雅黑" charset="0"/>
+                <a:ea typeface="微软雅黑" charset="0"/>
+                <a:cs typeface="微软雅黑" charset="0"/>
+              </a:rPr>
+              <a:t>输入</a:t>
+            </a:r>
+            <a:endParaRPr lang="zh-CN" altLang="en-US" sz="1400" b="1">
+              <a:latin typeface="微软雅黑" charset="0"/>
+              <a:ea typeface="微软雅黑" charset="0"/>
+              <a:cs typeface="微软雅黑" charset="0"/>
+            </a:endParaRPr>
+          </a:p>
+        </p:txBody>
+      </p:sp>
+      <p:sp>
+        <p:nvSpPr>
+          <p:cNvPr id="16" name="矩形: 圆角 36"/>
+          <p:cNvSpPr/>
+          <p:nvPr>
+            <p:custDataLst>
+              <p:tags r:id="rId6"/>
+            </p:custDataLst>
+          </p:nvPr>
+        </p:nvSpPr>
+        <p:spPr>
+          <a:xfrm rot="10800000" flipV="1">
+            <a:off x="180975" y="285115"/>
+            <a:ext cx="6445250" cy="6193790"/>
+          </a:xfrm>
+          <a:prstGeom prst="roundRect">
+            <a:avLst>
+              <a:gd name="adj" fmla="val 10039"/>
+            </a:avLst>
+          </a:prstGeom>
+          <a:noFill/>
+          <a:ln w="38100">
+            <a:solidFill>
+              <a:schemeClr val="tx1"/>
+            </a:solidFill>
+            <a:prstDash val="lgDash"/>
+          </a:ln>
+        </p:spPr>
+        <p:style>
+          <a:lnRef idx="2">
+            <a:schemeClr val="accent1">
+              <a:shade val="15000"/>
+            </a:schemeClr>
+          </a:lnRef>
+          <a:fillRef idx="1">
+            <a:schemeClr val="accent1"/>
+          </a:fillRef>
+          <a:effectRef idx="0">
+            <a:schemeClr val="accent1"/>
+          </a:effectRef>
+          <a:fontRef idx="minor">
+            <a:schemeClr val="lt1"/>
+          </a:fontRef>
+        </p:style>
+        <p:txBody>
+          <a:bodyPr rtlCol="0" anchor="ctr"/>
+          <a:p>
+            <a:pPr algn="ctr"/>
+            <a:endParaRPr lang="zh-CN" altLang="en-US"/>
+          </a:p>
+        </p:txBody>
+      </p:sp>
+      <p:sp>
+        <p:nvSpPr>
+          <p:cNvPr id="8" name="矩形: 圆角 36"/>
+          <p:cNvSpPr/>
+          <p:nvPr>
+            <p:custDataLst>
+              <p:tags r:id="rId7"/>
+            </p:custDataLst>
+          </p:nvPr>
+        </p:nvSpPr>
+        <p:spPr>
+          <a:xfrm rot="10800000" flipV="1">
+            <a:off x="6834505" y="116205"/>
+            <a:ext cx="2794635" cy="6193790"/>
+          </a:xfrm>
+          <a:prstGeom prst="roundRect">
+            <a:avLst>
+              <a:gd name="adj" fmla="val 10039"/>
+            </a:avLst>
+          </a:prstGeom>
+          <a:noFill/>
+          <a:ln w="38100">
+            <a:solidFill>
+              <a:schemeClr val="tx1"/>
+            </a:solidFill>
+            <a:prstDash val="lgDash"/>
+          </a:ln>
+        </p:spPr>
+        <p:style>
+          <a:lnRef idx="2">
+            <a:schemeClr val="accent1">
+              <a:shade val="15000"/>
+            </a:schemeClr>
+          </a:lnRef>
+          <a:fillRef idx="1">
+            <a:schemeClr val="accent1"/>
+          </a:fillRef>
+          <a:effectRef idx="0">
+            <a:schemeClr val="accent1"/>
+          </a:effectRef>
+          <a:fontRef idx="minor">
+            <a:schemeClr val="lt1"/>
+          </a:fontRef>
+        </p:style>
+        <p:txBody>
+          <a:bodyPr rtlCol="0" anchor="ctr"/>
+          <a:p>
+            <a:pPr algn="ctr"/>
+            <a:endParaRPr lang="zh-CN" altLang="en-US"/>
+          </a:p>
+        </p:txBody>
+      </p:sp>
+      <p:sp>
+        <p:nvSpPr>
+          <p:cNvPr id="10" name="矩形: 圆角 36"/>
+          <p:cNvSpPr/>
+          <p:nvPr>
+            <p:custDataLst>
+              <p:tags r:id="rId8"/>
+            </p:custDataLst>
+          </p:nvPr>
+        </p:nvSpPr>
+        <p:spPr>
+          <a:xfrm rot="10800000" flipV="1">
+            <a:off x="9942830" y="115570"/>
+            <a:ext cx="2044065" cy="3862705"/>
+          </a:xfrm>
+          <a:prstGeom prst="roundRect">
+            <a:avLst>
+              <a:gd name="adj" fmla="val 10039"/>
+            </a:avLst>
+          </a:prstGeom>
+          <a:noFill/>
+          <a:ln w="38100">
+            <a:solidFill>
+              <a:schemeClr val="tx1"/>
+            </a:solidFill>
+            <a:prstDash val="lgDash"/>
+          </a:ln>
+        </p:spPr>
+        <p:style>
+          <a:lnRef idx="2">
+            <a:schemeClr val="accent1">
+              <a:shade val="15000"/>
+            </a:schemeClr>
+          </a:lnRef>
+          <a:fillRef idx="1">
+            <a:schemeClr val="accent1"/>
+          </a:fillRef>
+          <a:effectRef idx="0">
+            <a:schemeClr val="accent1"/>
+          </a:effectRef>
+          <a:fontRef idx="minor">
+            <a:schemeClr val="lt1"/>
+          </a:fontRef>
+        </p:style>
+        <p:txBody>
+          <a:bodyPr rtlCol="0" anchor="ctr"/>
+          <a:p>
+            <a:pPr algn="ctr"/>
+            <a:endParaRPr lang="zh-CN" altLang="en-US"/>
+          </a:p>
+        </p:txBody>
+      </p:sp>
+    </p:spTree>
+  </p:cSld>
+  <p:clrMapOvr>
+    <a:masterClrMapping/>
+  </p:clrMapOvr>
+</p:sld>
+</file>
+
 <file path=ppt/slides/slide2.xml><?xml version="1.0" encoding="utf-8"?>
 <p:sld xmlns:a="http://schemas.openxmlformats.org/drawingml/2006/main" xmlns:r="http://schemas.openxmlformats.org/officeDocument/2006/relationships" xmlns:p="http://schemas.openxmlformats.org/presentationml/2006/main">
   <p:cSld>
@@ -6455,8 +8145,8 @@
         </p:blipFill>
         <p:spPr>
           <a:xfrm>
-            <a:off x="857250" y="1873250"/>
-            <a:ext cx="10477500" cy="3111500"/>
+            <a:off x="1896110" y="960120"/>
+            <a:ext cx="7666355" cy="2276475"/>
           </a:xfrm>
           <a:prstGeom prst="rect">
             <a:avLst/>
@@ -6475,7 +8165,7 @@
         </p:nvSpPr>
         <p:spPr>
           <a:xfrm>
-            <a:off x="759460" y="1676400"/>
+            <a:off x="1443990" y="796290"/>
             <a:ext cx="3195320" cy="389255"/>
           </a:xfrm>
           <a:prstGeom prst="rect">
@@ -6525,7 +8215,7 @@
         </p:nvSpPr>
         <p:spPr>
           <a:xfrm>
-            <a:off x="3404870" y="1676400"/>
+            <a:off x="3221355" y="796290"/>
             <a:ext cx="3195320" cy="389255"/>
           </a:xfrm>
           <a:prstGeom prst="rect">
@@ -6567,7 +8257,7 @@
         </p:nvSpPr>
         <p:spPr>
           <a:xfrm>
-            <a:off x="5818505" y="1676400"/>
+            <a:off x="5094605" y="796290"/>
             <a:ext cx="3195320" cy="389255"/>
           </a:xfrm>
           <a:prstGeom prst="rect">
@@ -6617,7 +8307,7 @@
         </p:nvSpPr>
         <p:spPr>
           <a:xfrm>
-            <a:off x="8390890" y="1676400"/>
+            <a:off x="6920230" y="796290"/>
             <a:ext cx="3195320" cy="389255"/>
           </a:xfrm>
           <a:prstGeom prst="rect">
@@ -6667,7 +8357,7 @@
         </p:nvSpPr>
         <p:spPr>
           <a:xfrm>
-            <a:off x="3630295" y="434340"/>
+            <a:off x="3630295" y="110490"/>
             <a:ext cx="4931410" cy="389255"/>
           </a:xfrm>
           <a:prstGeom prst="rect">
@@ -6717,7 +8407,7 @@
         </p:nvSpPr>
         <p:spPr>
           <a:xfrm>
-            <a:off x="3093085" y="5683885"/>
+            <a:off x="2897505" y="3215005"/>
             <a:ext cx="5664200" cy="389255"/>
           </a:xfrm>
           <a:prstGeom prst="rect">
@@ -6752,6 +8442,329 @@
               <a:ea typeface="微软雅黑" charset="0"/>
               <a:cs typeface="微软雅黑" charset="0"/>
             </a:endParaRPr>
+          </a:p>
+        </p:txBody>
+      </p:sp>
+      <p:pic>
+        <p:nvPicPr>
+          <p:cNvPr id="11" name="图片 10"/>
+          <p:cNvPicPr>
+            <a:picLocks noChangeAspect="1"/>
+          </p:cNvPicPr>
+          <p:nvPr>
+            <p:custDataLst>
+              <p:tags r:id="rId9"/>
+            </p:custDataLst>
+          </p:nvPr>
+        </p:nvPicPr>
+        <p:blipFill>
+          <a:blip r:embed="rId10"/>
+          <a:stretch>
+            <a:fillRect/>
+          </a:stretch>
+        </p:blipFill>
+        <p:spPr>
+          <a:xfrm>
+            <a:off x="5229225" y="4693285"/>
+            <a:ext cx="6577965" cy="1925320"/>
+          </a:xfrm>
+          <a:prstGeom prst="rect">
+            <a:avLst/>
+          </a:prstGeom>
+        </p:spPr>
+      </p:pic>
+      <p:pic>
+        <p:nvPicPr>
+          <p:cNvPr id="12" name="图片 11"/>
+          <p:cNvPicPr>
+            <a:picLocks noChangeAspect="1"/>
+          </p:cNvPicPr>
+          <p:nvPr>
+            <p:custDataLst>
+              <p:tags r:id="rId11"/>
+            </p:custDataLst>
+          </p:nvPr>
+        </p:nvPicPr>
+        <p:blipFill>
+          <a:blip r:embed="rId12"/>
+          <a:stretch>
+            <a:fillRect/>
+          </a:stretch>
+        </p:blipFill>
+        <p:spPr>
+          <a:xfrm>
+            <a:off x="0" y="4206240"/>
+            <a:ext cx="5020945" cy="2578735"/>
+          </a:xfrm>
+          <a:prstGeom prst="rect">
+            <a:avLst/>
+          </a:prstGeom>
+        </p:spPr>
+      </p:pic>
+      <p:sp>
+        <p:nvSpPr>
+          <p:cNvPr id="13" name="文本框 12"/>
+          <p:cNvSpPr txBox="1"/>
+          <p:nvPr>
+            <p:custDataLst>
+              <p:tags r:id="rId13"/>
+            </p:custDataLst>
+          </p:nvPr>
+        </p:nvSpPr>
+        <p:spPr>
+          <a:xfrm>
+            <a:off x="759460" y="3696335"/>
+            <a:ext cx="3195320" cy="548640"/>
+          </a:xfrm>
+          <a:prstGeom prst="rect">
+            <a:avLst/>
+          </a:prstGeom>
+          <a:noFill/>
+        </p:spPr>
+        <p:txBody>
+          <a:bodyPr wrap="square" rtlCol="0">
+            <a:noAutofit/>
+          </a:bodyPr>
+          <a:p>
+            <a:pPr algn="ctr"/>
+            <a:r>
+              <a:rPr lang="en-US" altLang="zh-CN" sz="1400" b="1">
+                <a:latin typeface="微软雅黑" charset="0"/>
+                <a:ea typeface="微软雅黑" charset="0"/>
+                <a:cs typeface="微软雅黑" charset="0"/>
+              </a:rPr>
+              <a:t>GPT-1 </a:t>
+            </a:r>
+            <a:r>
+              <a:rPr lang="zh-CN" altLang="en-US" sz="1400" b="1">
+                <a:latin typeface="微软雅黑" charset="0"/>
+                <a:ea typeface="微软雅黑" charset="0"/>
+                <a:cs typeface="微软雅黑" charset="0"/>
+              </a:rPr>
+              <a:t>微调</a:t>
+            </a:r>
+            <a:br>
+              <a:rPr lang="en-US" altLang="zh-CN" sz="1400" b="1">
+                <a:latin typeface="微软雅黑" charset="0"/>
+                <a:ea typeface="微软雅黑" charset="0"/>
+                <a:cs typeface="微软雅黑" charset="0"/>
+              </a:rPr>
+            </a:br>
+            <a:r>
+              <a:rPr lang="zh-CN" altLang="en-US" sz="1400" b="1">
+                <a:latin typeface="微软雅黑" charset="0"/>
+                <a:ea typeface="微软雅黑" charset="0"/>
+                <a:cs typeface="微软雅黑" charset="0"/>
+              </a:rPr>
+              <a:t>采用特殊字符</a:t>
+            </a:r>
+            <a:r>
+              <a:rPr lang="en-US" altLang="zh-CN" sz="1400" b="1">
+                <a:latin typeface="微软雅黑" charset="0"/>
+                <a:ea typeface="微软雅黑" charset="0"/>
+                <a:cs typeface="微软雅黑" charset="0"/>
+              </a:rPr>
+              <a:t>[Start][Extract]</a:t>
+            </a:r>
+            <a:r>
+              <a:rPr lang="zh-CN" altLang="en-US" sz="1400" b="1">
+                <a:latin typeface="微软雅黑" charset="0"/>
+                <a:ea typeface="微软雅黑" charset="0"/>
+                <a:cs typeface="微软雅黑" charset="0"/>
+              </a:rPr>
+              <a:t>等</a:t>
+            </a:r>
+            <a:endParaRPr lang="zh-CN" altLang="en-US" sz="1400" b="1">
+              <a:latin typeface="微软雅黑" charset="0"/>
+              <a:ea typeface="微软雅黑" charset="0"/>
+              <a:cs typeface="微软雅黑" charset="0"/>
+            </a:endParaRPr>
+          </a:p>
+        </p:txBody>
+      </p:sp>
+      <p:sp>
+        <p:nvSpPr>
+          <p:cNvPr id="14" name="文本框 13"/>
+          <p:cNvSpPr txBox="1"/>
+          <p:nvPr>
+            <p:custDataLst>
+              <p:tags r:id="rId14"/>
+            </p:custDataLst>
+          </p:nvPr>
+        </p:nvSpPr>
+        <p:spPr>
+          <a:xfrm>
+            <a:off x="6791325" y="3696970"/>
+            <a:ext cx="3195320" cy="742950"/>
+          </a:xfrm>
+          <a:prstGeom prst="rect">
+            <a:avLst/>
+          </a:prstGeom>
+          <a:noFill/>
+        </p:spPr>
+        <p:txBody>
+          <a:bodyPr wrap="square" rtlCol="0">
+            <a:noAutofit/>
+          </a:bodyPr>
+          <a:p>
+            <a:pPr algn="ctr"/>
+            <a:r>
+              <a:rPr lang="en-US" altLang="zh-CN" sz="1400" b="1">
+                <a:latin typeface="微软雅黑" charset="0"/>
+                <a:ea typeface="微软雅黑" charset="0"/>
+                <a:cs typeface="微软雅黑" charset="0"/>
+              </a:rPr>
+              <a:t>GPT-2 Zero-Shot</a:t>
+            </a:r>
+            <a:br>
+              <a:rPr lang="en-US" altLang="zh-CN" sz="1400" b="1">
+                <a:latin typeface="微软雅黑" charset="0"/>
+                <a:ea typeface="微软雅黑" charset="0"/>
+                <a:cs typeface="微软雅黑" charset="0"/>
+              </a:rPr>
+            </a:br>
+            <a:r>
+              <a:rPr lang="zh-CN" altLang="en-US" sz="1400" b="1">
+                <a:latin typeface="微软雅黑" charset="0"/>
+                <a:ea typeface="微软雅黑" charset="0"/>
+                <a:cs typeface="微软雅黑" charset="0"/>
+              </a:rPr>
+              <a:t>不采用特殊字符</a:t>
+            </a:r>
+            <a:br>
+              <a:rPr lang="zh-CN" altLang="en-US" sz="1400" b="1">
+                <a:latin typeface="微软雅黑" charset="0"/>
+                <a:ea typeface="微软雅黑" charset="0"/>
+                <a:cs typeface="微软雅黑" charset="0"/>
+              </a:rPr>
+            </a:br>
+            <a:r>
+              <a:rPr lang="zh-CN" altLang="en-US" sz="1400" b="1">
+                <a:latin typeface="微软雅黑" charset="0"/>
+                <a:ea typeface="微软雅黑" charset="0"/>
+                <a:cs typeface="微软雅黑" charset="0"/>
+              </a:rPr>
+              <a:t>使用</a:t>
+            </a:r>
+            <a:r>
+              <a:rPr lang="en-US" altLang="zh-CN" sz="1400" b="1">
+                <a:latin typeface="微软雅黑" charset="0"/>
+                <a:ea typeface="微软雅黑" charset="0"/>
+                <a:cs typeface="微软雅黑" charset="0"/>
+              </a:rPr>
+              <a:t>prompt(</a:t>
+            </a:r>
+            <a:r>
+              <a:rPr lang="zh-CN" altLang="en-US" sz="1400" b="1">
+                <a:latin typeface="微软雅黑" charset="0"/>
+                <a:ea typeface="微软雅黑" charset="0"/>
+                <a:cs typeface="微软雅黑" charset="0"/>
+              </a:rPr>
+              <a:t>文本</a:t>
+            </a:r>
+            <a:r>
+              <a:rPr lang="en-US" altLang="zh-CN" sz="1400" b="1">
+                <a:latin typeface="微软雅黑" charset="0"/>
+                <a:ea typeface="微软雅黑" charset="0"/>
+                <a:cs typeface="微软雅黑" charset="0"/>
+              </a:rPr>
+              <a:t>)</a:t>
+            </a:r>
+            <a:r>
+              <a:rPr lang="zh-CN" altLang="en-US" sz="1400" b="1">
+                <a:latin typeface="微软雅黑" charset="0"/>
+                <a:ea typeface="微软雅黑" charset="0"/>
+                <a:cs typeface="微软雅黑" charset="0"/>
+              </a:rPr>
+              <a:t>引导</a:t>
+            </a:r>
+            <a:endParaRPr lang="zh-CN" altLang="en-US" sz="1400" b="1">
+              <a:latin typeface="微软雅黑" charset="0"/>
+              <a:ea typeface="微软雅黑" charset="0"/>
+              <a:cs typeface="微软雅黑" charset="0"/>
+            </a:endParaRPr>
+          </a:p>
+        </p:txBody>
+      </p:sp>
+      <p:sp>
+        <p:nvSpPr>
+          <p:cNvPr id="15" name="右箭头 14"/>
+          <p:cNvSpPr/>
+          <p:nvPr/>
+        </p:nvSpPr>
+        <p:spPr>
+          <a:xfrm>
+            <a:off x="4532630" y="5471795"/>
+            <a:ext cx="915035" cy="412750"/>
+          </a:xfrm>
+          <a:prstGeom prst="rightArrow">
+            <a:avLst/>
+          </a:prstGeom>
+        </p:spPr>
+        <p:style>
+          <a:lnRef idx="2">
+            <a:schemeClr val="accent1">
+              <a:lumMod val="75000"/>
+            </a:schemeClr>
+          </a:lnRef>
+          <a:fillRef idx="1">
+            <a:schemeClr val="accent1"/>
+          </a:fillRef>
+          <a:effectRef idx="0">
+            <a:srgbClr val="FFFFFF"/>
+          </a:effectRef>
+          <a:fontRef idx="minor">
+            <a:schemeClr val="lt1"/>
+          </a:fontRef>
+        </p:style>
+        <p:txBody>
+          <a:bodyPr rtlCol="0" anchor="ctr"/>
+          <a:p>
+            <a:pPr algn="ctr"/>
+            <a:endParaRPr lang="zh-CN" altLang="en-US"/>
+          </a:p>
+        </p:txBody>
+      </p:sp>
+      <p:sp>
+        <p:nvSpPr>
+          <p:cNvPr id="16" name="右箭头 15"/>
+          <p:cNvSpPr/>
+          <p:nvPr>
+            <p:custDataLst>
+              <p:tags r:id="rId15"/>
+            </p:custDataLst>
+          </p:nvPr>
+        </p:nvSpPr>
+        <p:spPr>
+          <a:xfrm>
+            <a:off x="3724275" y="3756660"/>
+            <a:ext cx="3685540" cy="412750"/>
+          </a:xfrm>
+          <a:prstGeom prst="rightArrow">
+            <a:avLst/>
+          </a:prstGeom>
+        </p:spPr>
+        <p:style>
+          <a:lnRef idx="2">
+            <a:schemeClr val="accent1">
+              <a:lumMod val="75000"/>
+            </a:schemeClr>
+          </a:lnRef>
+          <a:fillRef idx="1">
+            <a:schemeClr val="accent1"/>
+          </a:fillRef>
+          <a:effectRef idx="0">
+            <a:srgbClr val="FFFFFF"/>
+          </a:effectRef>
+          <a:fontRef idx="minor">
+            <a:schemeClr val="lt1"/>
+          </a:fontRef>
+        </p:style>
+        <p:txBody>
+          <a:bodyPr rtlCol="0" anchor="ctr"/>
+          <a:p>
+            <a:pPr algn="ctr"/>
+            <a:endParaRPr lang="zh-CN" altLang="en-US"/>
           </a:p>
         </p:txBody>
       </p:sp>
@@ -6763,6 +8776,846 @@
 </p:sld>
 </file>
 
+<file path=ppt/slides/slide7.xml><?xml version="1.0" encoding="utf-8"?>
+<p:sld xmlns:a="http://schemas.openxmlformats.org/drawingml/2006/main" xmlns:r="http://schemas.openxmlformats.org/officeDocument/2006/relationships" xmlns:p="http://schemas.openxmlformats.org/presentationml/2006/main">
+  <p:cSld>
+    <p:spTree>
+      <p:nvGrpSpPr>
+        <p:cNvPr id="1" name=""/>
+        <p:cNvGrpSpPr/>
+        <p:nvPr/>
+      </p:nvGrpSpPr>
+      <p:grpSpPr/>
+      <p:sp>
+        <p:nvSpPr>
+          <p:cNvPr id="2" name="标题 1"/>
+          <p:cNvSpPr>
+            <a:spLocks noGrp="1"/>
+          </p:cNvSpPr>
+          <p:nvPr>
+            <p:ph type="ctrTitle"/>
+          </p:nvPr>
+        </p:nvSpPr>
+        <p:spPr/>
+        <p:txBody>
+          <a:bodyPr/>
+          <a:p>
+            <a:r>
+              <a:rPr lang="en-US" altLang="zh-CN"/>
+              <a:t>GPT-3</a:t>
+            </a:r>
+            <a:endParaRPr lang="en-US" altLang="zh-CN"/>
+          </a:p>
+        </p:txBody>
+      </p:sp>
+      <p:sp>
+        <p:nvSpPr>
+          <p:cNvPr id="3" name="副标题 2"/>
+          <p:cNvSpPr>
+            <a:spLocks noGrp="1"/>
+          </p:cNvSpPr>
+          <p:nvPr>
+            <p:ph type="subTitle" idx="1"/>
+          </p:nvPr>
+        </p:nvSpPr>
+        <p:spPr/>
+        <p:txBody>
+          <a:bodyPr/>
+          <a:p>
+            <a:endParaRPr lang="zh-CN" altLang="en-US"/>
+          </a:p>
+        </p:txBody>
+      </p:sp>
+    </p:spTree>
+  </p:cSld>
+  <p:clrMapOvr>
+    <a:masterClrMapping/>
+  </p:clrMapOvr>
+</p:sld>
+</file>
+
+<file path=ppt/slides/slide8.xml><?xml version="1.0" encoding="utf-8"?>
+<p:sld xmlns:a="http://schemas.openxmlformats.org/drawingml/2006/main" xmlns:r="http://schemas.openxmlformats.org/officeDocument/2006/relationships" xmlns:p="http://schemas.openxmlformats.org/presentationml/2006/main">
+  <p:cSld>
+    <p:spTree>
+      <p:nvGrpSpPr>
+        <p:cNvPr id="1" name=""/>
+        <p:cNvGrpSpPr/>
+        <p:nvPr/>
+      </p:nvGrpSpPr>
+      <p:grpSpPr/>
+      <p:pic>
+        <p:nvPicPr>
+          <p:cNvPr id="4" name="图片 3"/>
+          <p:cNvPicPr>
+            <a:picLocks noChangeAspect="1"/>
+          </p:cNvPicPr>
+          <p:nvPr>
+            <p:custDataLst>
+              <p:tags r:id="rId1"/>
+            </p:custDataLst>
+          </p:nvPr>
+        </p:nvPicPr>
+        <p:blipFill>
+          <a:blip r:embed="rId2"/>
+          <a:stretch>
+            <a:fillRect/>
+          </a:stretch>
+        </p:blipFill>
+        <p:spPr>
+          <a:xfrm>
+            <a:off x="0" y="429895"/>
+            <a:ext cx="7241540" cy="5998210"/>
+          </a:xfrm>
+          <a:prstGeom prst="rect">
+            <a:avLst/>
+          </a:prstGeom>
+        </p:spPr>
+      </p:pic>
+      <p:pic>
+        <p:nvPicPr>
+          <p:cNvPr id="5" name="图片 4"/>
+          <p:cNvPicPr>
+            <a:picLocks noChangeAspect="1"/>
+          </p:cNvPicPr>
+          <p:nvPr>
+            <p:custDataLst>
+              <p:tags r:id="rId3"/>
+            </p:custDataLst>
+          </p:nvPr>
+        </p:nvPicPr>
+        <p:blipFill>
+          <a:blip r:embed="rId4"/>
+          <a:stretch>
+            <a:fillRect/>
+          </a:stretch>
+        </p:blipFill>
+        <p:spPr>
+          <a:xfrm>
+            <a:off x="6806565" y="3869055"/>
+            <a:ext cx="5385435" cy="1475105"/>
+          </a:xfrm>
+          <a:prstGeom prst="rect">
+            <a:avLst/>
+          </a:prstGeom>
+        </p:spPr>
+      </p:pic>
+      <p:sp>
+        <p:nvSpPr>
+          <p:cNvPr id="13" name="文本框 12"/>
+          <p:cNvSpPr txBox="1"/>
+          <p:nvPr>
+            <p:custDataLst>
+              <p:tags r:id="rId5"/>
+            </p:custDataLst>
+          </p:nvPr>
+        </p:nvSpPr>
+        <p:spPr>
+          <a:xfrm>
+            <a:off x="234950" y="0"/>
+            <a:ext cx="3195320" cy="548640"/>
+          </a:xfrm>
+          <a:prstGeom prst="rect">
+            <a:avLst/>
+          </a:prstGeom>
+          <a:noFill/>
+        </p:spPr>
+        <p:txBody>
+          <a:bodyPr wrap="square" rtlCol="0">
+            <a:noAutofit/>
+          </a:bodyPr>
+          <a:p>
+            <a:pPr algn="ctr"/>
+            <a:r>
+              <a:rPr lang="en-US" altLang="zh-CN" sz="1400" b="1">
+                <a:latin typeface="微软雅黑" charset="0"/>
+                <a:ea typeface="微软雅黑" charset="0"/>
+                <a:cs typeface="微软雅黑" charset="0"/>
+              </a:rPr>
+              <a:t>Zero-Shot</a:t>
+            </a:r>
+            <a:br>
+              <a:rPr lang="en-US" altLang="zh-CN" sz="1400" b="1">
+                <a:latin typeface="微软雅黑" charset="0"/>
+                <a:ea typeface="微软雅黑" charset="0"/>
+                <a:cs typeface="微软雅黑" charset="0"/>
+              </a:rPr>
+            </a:br>
+            <a:r>
+              <a:rPr lang="zh-CN" altLang="en-US" sz="1400" b="1">
+                <a:latin typeface="微软雅黑" charset="0"/>
+                <a:ea typeface="微软雅黑" charset="0"/>
+                <a:cs typeface="微软雅黑" charset="0"/>
+              </a:rPr>
+              <a:t>不提供任何</a:t>
+            </a:r>
+            <a:r>
+              <a:rPr lang="zh-CN" altLang="en-US" sz="1400" b="1">
+                <a:latin typeface="微软雅黑" charset="0"/>
+                <a:ea typeface="微软雅黑" charset="0"/>
+                <a:cs typeface="微软雅黑" charset="0"/>
+              </a:rPr>
+              <a:t>例子</a:t>
+            </a:r>
+            <a:endParaRPr lang="zh-CN" altLang="en-US" sz="1400" b="1">
+              <a:latin typeface="微软雅黑" charset="0"/>
+              <a:ea typeface="微软雅黑" charset="0"/>
+              <a:cs typeface="微软雅黑" charset="0"/>
+            </a:endParaRPr>
+          </a:p>
+        </p:txBody>
+      </p:sp>
+      <p:sp>
+        <p:nvSpPr>
+          <p:cNvPr id="6" name="文本框 5"/>
+          <p:cNvSpPr txBox="1"/>
+          <p:nvPr>
+            <p:custDataLst>
+              <p:tags r:id="rId6"/>
+            </p:custDataLst>
+          </p:nvPr>
+        </p:nvSpPr>
+        <p:spPr>
+          <a:xfrm>
+            <a:off x="361950" y="2065020"/>
+            <a:ext cx="3195320" cy="548640"/>
+          </a:xfrm>
+          <a:prstGeom prst="rect">
+            <a:avLst/>
+          </a:prstGeom>
+          <a:noFill/>
+        </p:spPr>
+        <p:txBody>
+          <a:bodyPr wrap="square" rtlCol="0">
+            <a:noAutofit/>
+          </a:bodyPr>
+          <a:p>
+            <a:pPr algn="ctr"/>
+            <a:r>
+              <a:rPr lang="en-US" altLang="zh-CN" sz="1400" b="1">
+                <a:latin typeface="微软雅黑" charset="0"/>
+                <a:ea typeface="微软雅黑" charset="0"/>
+                <a:cs typeface="微软雅黑" charset="0"/>
+              </a:rPr>
+              <a:t>One-Shot</a:t>
+            </a:r>
+            <a:br>
+              <a:rPr lang="en-US" altLang="zh-CN" sz="1400" b="1">
+                <a:latin typeface="微软雅黑" charset="0"/>
+                <a:ea typeface="微软雅黑" charset="0"/>
+                <a:cs typeface="微软雅黑" charset="0"/>
+              </a:rPr>
+            </a:br>
+            <a:r>
+              <a:rPr lang="zh-CN" altLang="en-US" sz="1400" b="1">
+                <a:latin typeface="微软雅黑" charset="0"/>
+                <a:ea typeface="微软雅黑" charset="0"/>
+                <a:cs typeface="微软雅黑" charset="0"/>
+              </a:rPr>
+              <a:t>仅提供一个</a:t>
+            </a:r>
+            <a:r>
+              <a:rPr lang="zh-CN" altLang="en-US" sz="1400" b="1">
+                <a:latin typeface="微软雅黑" charset="0"/>
+                <a:ea typeface="微软雅黑" charset="0"/>
+                <a:cs typeface="微软雅黑" charset="0"/>
+              </a:rPr>
+              <a:t>例子</a:t>
+            </a:r>
+            <a:endParaRPr lang="zh-CN" altLang="en-US" sz="1400" b="1">
+              <a:latin typeface="微软雅黑" charset="0"/>
+              <a:ea typeface="微软雅黑" charset="0"/>
+              <a:cs typeface="微软雅黑" charset="0"/>
+            </a:endParaRPr>
+          </a:p>
+        </p:txBody>
+      </p:sp>
+      <p:sp>
+        <p:nvSpPr>
+          <p:cNvPr id="7" name="文本框 6"/>
+          <p:cNvSpPr txBox="1"/>
+          <p:nvPr>
+            <p:custDataLst>
+              <p:tags r:id="rId7"/>
+            </p:custDataLst>
+          </p:nvPr>
+        </p:nvSpPr>
+        <p:spPr>
+          <a:xfrm>
+            <a:off x="234950" y="3983355"/>
+            <a:ext cx="3195320" cy="548640"/>
+          </a:xfrm>
+          <a:prstGeom prst="rect">
+            <a:avLst/>
+          </a:prstGeom>
+          <a:noFill/>
+        </p:spPr>
+        <p:txBody>
+          <a:bodyPr wrap="square" rtlCol="0">
+            <a:noAutofit/>
+          </a:bodyPr>
+          <a:p>
+            <a:pPr algn="ctr"/>
+            <a:r>
+              <a:rPr lang="en-US" altLang="zh-CN" sz="1400" b="1">
+                <a:latin typeface="微软雅黑" charset="0"/>
+                <a:ea typeface="微软雅黑" charset="0"/>
+                <a:cs typeface="微软雅黑" charset="0"/>
+              </a:rPr>
+              <a:t>Few-Shot</a:t>
+            </a:r>
+            <a:br>
+              <a:rPr lang="en-US" altLang="zh-CN" sz="1400" b="1">
+                <a:latin typeface="微软雅黑" charset="0"/>
+                <a:ea typeface="微软雅黑" charset="0"/>
+                <a:cs typeface="微软雅黑" charset="0"/>
+              </a:rPr>
+            </a:br>
+            <a:r>
+              <a:rPr lang="zh-CN" altLang="en-US" sz="1400" b="1">
+                <a:latin typeface="微软雅黑" charset="0"/>
+                <a:ea typeface="微软雅黑" charset="0"/>
+                <a:cs typeface="微软雅黑" charset="0"/>
+              </a:rPr>
+              <a:t>提供几个</a:t>
+            </a:r>
+            <a:r>
+              <a:rPr lang="zh-CN" altLang="en-US" sz="1400" b="1">
+                <a:latin typeface="微软雅黑" charset="0"/>
+                <a:ea typeface="微软雅黑" charset="0"/>
+                <a:cs typeface="微软雅黑" charset="0"/>
+              </a:rPr>
+              <a:t>例子</a:t>
+            </a:r>
+            <a:endParaRPr lang="zh-CN" altLang="en-US" sz="1400" b="1">
+              <a:latin typeface="微软雅黑" charset="0"/>
+              <a:ea typeface="微软雅黑" charset="0"/>
+              <a:cs typeface="微软雅黑" charset="0"/>
+            </a:endParaRPr>
+          </a:p>
+        </p:txBody>
+      </p:sp>
+      <p:sp>
+        <p:nvSpPr>
+          <p:cNvPr id="8" name="文本框 7"/>
+          <p:cNvSpPr txBox="1"/>
+          <p:nvPr>
+            <p:custDataLst>
+              <p:tags r:id="rId8"/>
+            </p:custDataLst>
+          </p:nvPr>
+        </p:nvSpPr>
+        <p:spPr>
+          <a:xfrm>
+            <a:off x="8027670" y="127000"/>
+            <a:ext cx="3195320" cy="548640"/>
+          </a:xfrm>
+          <a:prstGeom prst="rect">
+            <a:avLst/>
+          </a:prstGeom>
+          <a:noFill/>
+        </p:spPr>
+        <p:txBody>
+          <a:bodyPr wrap="square" rtlCol="0">
+            <a:noAutofit/>
+          </a:bodyPr>
+          <a:p>
+            <a:pPr algn="ctr"/>
+            <a:r>
+              <a:rPr lang="zh-CN" altLang="en-US" sz="1400" b="1">
+                <a:latin typeface="微软雅黑" charset="0"/>
+                <a:ea typeface="微软雅黑" charset="0"/>
+                <a:cs typeface="微软雅黑" charset="0"/>
+              </a:rPr>
+              <a:t>训练数据集</a:t>
+            </a:r>
+            <a:r>
+              <a:rPr lang="en-US" altLang="zh-CN" sz="1400" b="1">
+                <a:latin typeface="微软雅黑" charset="0"/>
+                <a:ea typeface="微软雅黑" charset="0"/>
+                <a:cs typeface="微软雅黑" charset="0"/>
+              </a:rPr>
+              <a:t>and</a:t>
+            </a:r>
+            <a:r>
+              <a:rPr lang="zh-CN" altLang="en-US" sz="1400" b="1">
+                <a:latin typeface="微软雅黑" charset="0"/>
+                <a:ea typeface="微软雅黑" charset="0"/>
+                <a:cs typeface="微软雅黑" charset="0"/>
+              </a:rPr>
+              <a:t>数据</a:t>
+            </a:r>
+            <a:r>
+              <a:rPr lang="zh-CN" altLang="en-US" sz="1400" b="1">
+                <a:latin typeface="微软雅黑" charset="0"/>
+                <a:ea typeface="微软雅黑" charset="0"/>
+                <a:cs typeface="微软雅黑" charset="0"/>
+              </a:rPr>
+              <a:t>规模</a:t>
+            </a:r>
+            <a:endParaRPr lang="zh-CN" altLang="en-US" sz="1400" b="1">
+              <a:latin typeface="微软雅黑" charset="0"/>
+              <a:ea typeface="微软雅黑" charset="0"/>
+              <a:cs typeface="微软雅黑" charset="0"/>
+            </a:endParaRPr>
+          </a:p>
+        </p:txBody>
+      </p:sp>
+      <p:sp>
+        <p:nvSpPr>
+          <p:cNvPr id="10" name="文本框 9"/>
+          <p:cNvSpPr txBox="1"/>
+          <p:nvPr>
+            <p:custDataLst>
+              <p:tags r:id="rId9"/>
+            </p:custDataLst>
+          </p:nvPr>
+        </p:nvSpPr>
+        <p:spPr>
+          <a:xfrm>
+            <a:off x="6595745" y="548640"/>
+            <a:ext cx="3195320" cy="548640"/>
+          </a:xfrm>
+          <a:prstGeom prst="rect">
+            <a:avLst/>
+          </a:prstGeom>
+          <a:noFill/>
+        </p:spPr>
+        <p:txBody>
+          <a:bodyPr wrap="square" rtlCol="0">
+            <a:noAutofit/>
+          </a:bodyPr>
+          <a:p>
+            <a:pPr algn="ctr"/>
+            <a:r>
+              <a:rPr lang="en-US" altLang="zh-CN" sz="1400" b="1">
+                <a:latin typeface="微软雅黑" charset="0"/>
+                <a:ea typeface="微软雅黑" charset="0"/>
+                <a:cs typeface="微软雅黑" charset="0"/>
+              </a:rPr>
+              <a:t>GPT-1</a:t>
+            </a:r>
+            <a:br>
+              <a:rPr lang="en-US" altLang="zh-CN" sz="1400" b="1">
+                <a:latin typeface="微软雅黑" charset="0"/>
+                <a:ea typeface="微软雅黑" charset="0"/>
+                <a:cs typeface="微软雅黑" charset="0"/>
+              </a:rPr>
+            </a:br>
+            <a:r>
+              <a:rPr lang="en-US" altLang="zh-CN" sz="1400" b="1">
+                <a:latin typeface="微软雅黑" charset="0"/>
+                <a:ea typeface="微软雅黑" charset="0"/>
+                <a:cs typeface="微软雅黑" charset="0"/>
+              </a:rPr>
+              <a:t>BooksCorpus 数据集</a:t>
+            </a:r>
+            <a:br>
+              <a:rPr lang="en-US" altLang="zh-CN" sz="1400" b="1">
+                <a:latin typeface="微软雅黑" charset="0"/>
+                <a:ea typeface="微软雅黑" charset="0"/>
+                <a:cs typeface="微软雅黑" charset="0"/>
+              </a:rPr>
+            </a:br>
+            <a:endParaRPr lang="en-US" altLang="zh-CN" sz="1400" b="1">
+              <a:latin typeface="微软雅黑" charset="0"/>
+              <a:ea typeface="微软雅黑" charset="0"/>
+              <a:cs typeface="微软雅黑" charset="0"/>
+            </a:endParaRPr>
+          </a:p>
+        </p:txBody>
+      </p:sp>
+      <p:sp>
+        <p:nvSpPr>
+          <p:cNvPr id="12" name="文本框 11"/>
+          <p:cNvSpPr txBox="1"/>
+          <p:nvPr>
+            <p:custDataLst>
+              <p:tags r:id="rId10"/>
+            </p:custDataLst>
+          </p:nvPr>
+        </p:nvSpPr>
+        <p:spPr>
+          <a:xfrm>
+            <a:off x="6595745" y="1931035"/>
+            <a:ext cx="3195320" cy="937895"/>
+          </a:xfrm>
+          <a:prstGeom prst="rect">
+            <a:avLst/>
+          </a:prstGeom>
+          <a:noFill/>
+        </p:spPr>
+        <p:txBody>
+          <a:bodyPr wrap="square" rtlCol="0">
+            <a:noAutofit/>
+          </a:bodyPr>
+          <a:p>
+            <a:pPr algn="ctr"/>
+            <a:r>
+              <a:rPr lang="en-US" altLang="zh-CN" sz="1400" b="1">
+                <a:latin typeface="微软雅黑" charset="0"/>
+                <a:ea typeface="微软雅黑" charset="0"/>
+                <a:cs typeface="微软雅黑" charset="0"/>
+              </a:rPr>
+              <a:t>GPT-2</a:t>
+            </a:r>
+            <a:br>
+              <a:rPr lang="en-US" altLang="zh-CN" sz="1400" b="1">
+                <a:latin typeface="微软雅黑" charset="0"/>
+                <a:ea typeface="微软雅黑" charset="0"/>
+                <a:cs typeface="微软雅黑" charset="0"/>
+              </a:rPr>
+            </a:br>
+            <a:r>
+              <a:rPr lang="en-US" altLang="zh-CN" sz="1400" b="1">
+                <a:latin typeface="微软雅黑" charset="0"/>
+                <a:ea typeface="微软雅黑" charset="0"/>
+                <a:cs typeface="微软雅黑" charset="0"/>
+              </a:rPr>
+              <a:t>WebText</a:t>
+            </a:r>
+            <a:r>
+              <a:rPr lang="zh-CN" altLang="en-US" sz="1400" b="1">
+                <a:latin typeface="微软雅黑" charset="0"/>
+                <a:ea typeface="微软雅黑" charset="0"/>
+                <a:cs typeface="微软雅黑" charset="0"/>
+              </a:rPr>
+              <a:t>：过滤后的Common Crawl</a:t>
+            </a:r>
+            <a:br>
+              <a:rPr lang="zh-CN" altLang="en-US" sz="1400" b="1">
+                <a:latin typeface="微软雅黑" charset="0"/>
+                <a:ea typeface="微软雅黑" charset="0"/>
+                <a:cs typeface="微软雅黑" charset="0"/>
+              </a:rPr>
+            </a:br>
+            <a:r>
+              <a:rPr lang="en-US" altLang="zh-CN" sz="1400" b="1">
+                <a:latin typeface="微软雅黑" charset="0"/>
+                <a:ea typeface="微软雅黑" charset="0"/>
+                <a:cs typeface="微软雅黑" charset="0"/>
+              </a:rPr>
+              <a:t>8billion</a:t>
+            </a:r>
+            <a:r>
+              <a:rPr lang="zh-CN" altLang="en-US" sz="1400" b="1">
+                <a:latin typeface="微软雅黑" charset="0"/>
+                <a:ea typeface="微软雅黑" charset="0"/>
+                <a:cs typeface="微软雅黑" charset="0"/>
+              </a:rPr>
+              <a:t>文本</a:t>
+            </a:r>
+            <a:r>
+              <a:rPr lang="en-US" altLang="zh-CN" sz="1400" b="1">
+                <a:latin typeface="微软雅黑" charset="0"/>
+                <a:ea typeface="微软雅黑" charset="0"/>
+                <a:cs typeface="微软雅黑" charset="0"/>
+              </a:rPr>
+              <a:t>(40GB)</a:t>
+            </a:r>
+            <a:br>
+              <a:rPr lang="en-US" altLang="zh-CN" sz="1400" b="1">
+                <a:latin typeface="微软雅黑" charset="0"/>
+                <a:ea typeface="微软雅黑" charset="0"/>
+                <a:cs typeface="微软雅黑" charset="0"/>
+              </a:rPr>
+            </a:br>
+            <a:endParaRPr lang="en-US" altLang="zh-CN" sz="1400" b="1">
+              <a:latin typeface="微软雅黑" charset="0"/>
+              <a:ea typeface="微软雅黑" charset="0"/>
+              <a:cs typeface="微软雅黑" charset="0"/>
+            </a:endParaRPr>
+          </a:p>
+        </p:txBody>
+      </p:sp>
+      <p:pic>
+        <p:nvPicPr>
+          <p:cNvPr id="14" name="图片 13"/>
+          <p:cNvPicPr>
+            <a:picLocks noChangeAspect="1"/>
+          </p:cNvPicPr>
+          <p:nvPr>
+            <p:custDataLst>
+              <p:tags r:id="rId11"/>
+            </p:custDataLst>
+          </p:nvPr>
+        </p:nvPicPr>
+        <p:blipFill>
+          <a:blip r:embed="rId12"/>
+          <a:stretch>
+            <a:fillRect/>
+          </a:stretch>
+        </p:blipFill>
+        <p:spPr>
+          <a:xfrm>
+            <a:off x="6805930" y="5234305"/>
+            <a:ext cx="5386070" cy="1531620"/>
+          </a:xfrm>
+          <a:prstGeom prst="rect">
+            <a:avLst/>
+          </a:prstGeom>
+        </p:spPr>
+      </p:pic>
+      <p:sp>
+        <p:nvSpPr>
+          <p:cNvPr id="15" name="文本框 14"/>
+          <p:cNvSpPr txBox="1"/>
+          <p:nvPr>
+            <p:custDataLst>
+              <p:tags r:id="rId13"/>
+            </p:custDataLst>
+          </p:nvPr>
+        </p:nvSpPr>
+        <p:spPr>
+          <a:xfrm>
+            <a:off x="9306560" y="1931035"/>
+            <a:ext cx="3195320" cy="937895"/>
+          </a:xfrm>
+          <a:prstGeom prst="rect">
+            <a:avLst/>
+          </a:prstGeom>
+          <a:noFill/>
+        </p:spPr>
+        <p:txBody>
+          <a:bodyPr wrap="square" rtlCol="0">
+            <a:noAutofit/>
+          </a:bodyPr>
+          <a:p>
+            <a:pPr algn="ctr"/>
+            <a:r>
+              <a:rPr lang="en-US" altLang="zh-CN" sz="1400" b="1">
+                <a:latin typeface="微软雅黑" charset="0"/>
+                <a:ea typeface="微软雅黑" charset="0"/>
+                <a:cs typeface="微软雅黑" charset="0"/>
+              </a:rPr>
+              <a:t>GPT-2</a:t>
+            </a:r>
+            <a:br>
+              <a:rPr lang="en-US" altLang="zh-CN" sz="1400" b="1">
+                <a:latin typeface="微软雅黑" charset="0"/>
+                <a:ea typeface="微软雅黑" charset="0"/>
+                <a:cs typeface="微软雅黑" charset="0"/>
+              </a:rPr>
+            </a:br>
+            <a:r>
+              <a:rPr lang="zh-CN" altLang="en-US" sz="1400" b="1">
+                <a:latin typeface="微软雅黑" charset="0"/>
+                <a:ea typeface="微软雅黑" charset="0"/>
+                <a:cs typeface="微软雅黑" charset="0"/>
+              </a:rPr>
+              <a:t>最大</a:t>
+            </a:r>
+            <a:r>
+              <a:rPr lang="en-US" altLang="zh-CN" sz="1400" b="1">
+                <a:latin typeface="微软雅黑" charset="0"/>
+                <a:ea typeface="微软雅黑" charset="0"/>
+                <a:cs typeface="微软雅黑" charset="0"/>
+              </a:rPr>
+              <a:t>1.524B</a:t>
+            </a:r>
+            <a:endParaRPr lang="en-US" altLang="zh-CN" sz="1400" b="1">
+              <a:latin typeface="微软雅黑" charset="0"/>
+              <a:ea typeface="微软雅黑" charset="0"/>
+              <a:cs typeface="微软雅黑" charset="0"/>
+            </a:endParaRPr>
+          </a:p>
+        </p:txBody>
+      </p:sp>
+      <p:sp>
+        <p:nvSpPr>
+          <p:cNvPr id="16" name="下箭头 15"/>
+          <p:cNvSpPr/>
+          <p:nvPr/>
+        </p:nvSpPr>
+        <p:spPr>
+          <a:xfrm>
+            <a:off x="7957820" y="1252855"/>
+            <a:ext cx="389890" cy="609600"/>
+          </a:xfrm>
+          <a:prstGeom prst="downArrow">
+            <a:avLst/>
+          </a:prstGeom>
+        </p:spPr>
+        <p:style>
+          <a:lnRef idx="2">
+            <a:schemeClr val="accent1">
+              <a:lumMod val="75000"/>
+            </a:schemeClr>
+          </a:lnRef>
+          <a:fillRef idx="1">
+            <a:schemeClr val="accent1"/>
+          </a:fillRef>
+          <a:effectRef idx="0">
+            <a:srgbClr val="FFFFFF"/>
+          </a:effectRef>
+          <a:fontRef idx="minor">
+            <a:schemeClr val="lt1"/>
+          </a:fontRef>
+        </p:style>
+        <p:txBody>
+          <a:bodyPr rtlCol="0" anchor="ctr"/>
+          <a:p>
+            <a:pPr algn="ctr"/>
+            <a:endParaRPr lang="zh-CN" altLang="en-US"/>
+          </a:p>
+        </p:txBody>
+      </p:sp>
+      <p:sp>
+        <p:nvSpPr>
+          <p:cNvPr id="17" name="下箭头 16"/>
+          <p:cNvSpPr/>
+          <p:nvPr>
+            <p:custDataLst>
+              <p:tags r:id="rId14"/>
+            </p:custDataLst>
+          </p:nvPr>
+        </p:nvSpPr>
+        <p:spPr>
+          <a:xfrm>
+            <a:off x="8027670" y="2868930"/>
+            <a:ext cx="389890" cy="609600"/>
+          </a:xfrm>
+          <a:prstGeom prst="downArrow">
+            <a:avLst/>
+          </a:prstGeom>
+        </p:spPr>
+        <p:style>
+          <a:lnRef idx="2">
+            <a:schemeClr val="accent1">
+              <a:lumMod val="75000"/>
+            </a:schemeClr>
+          </a:lnRef>
+          <a:fillRef idx="1">
+            <a:schemeClr val="accent1"/>
+          </a:fillRef>
+          <a:effectRef idx="0">
+            <a:srgbClr val="FFFFFF"/>
+          </a:effectRef>
+          <a:fontRef idx="minor">
+            <a:schemeClr val="lt1"/>
+          </a:fontRef>
+        </p:style>
+        <p:txBody>
+          <a:bodyPr rtlCol="0" anchor="ctr"/>
+          <a:p>
+            <a:pPr algn="ctr"/>
+            <a:endParaRPr lang="zh-CN" altLang="en-US"/>
+          </a:p>
+        </p:txBody>
+      </p:sp>
+      <p:sp>
+        <p:nvSpPr>
+          <p:cNvPr id="18" name="下箭头 17"/>
+          <p:cNvSpPr/>
+          <p:nvPr>
+            <p:custDataLst>
+              <p:tags r:id="rId15"/>
+            </p:custDataLst>
+          </p:nvPr>
+        </p:nvSpPr>
+        <p:spPr>
+          <a:xfrm>
+            <a:off x="10709275" y="2868930"/>
+            <a:ext cx="389890" cy="609600"/>
+          </a:xfrm>
+          <a:prstGeom prst="downArrow">
+            <a:avLst/>
+          </a:prstGeom>
+        </p:spPr>
+        <p:style>
+          <a:lnRef idx="2">
+            <a:schemeClr val="accent1">
+              <a:lumMod val="75000"/>
+            </a:schemeClr>
+          </a:lnRef>
+          <a:fillRef idx="1">
+            <a:schemeClr val="accent1"/>
+          </a:fillRef>
+          <a:effectRef idx="0">
+            <a:srgbClr val="FFFFFF"/>
+          </a:effectRef>
+          <a:fontRef idx="minor">
+            <a:schemeClr val="lt1"/>
+          </a:fontRef>
+        </p:style>
+        <p:txBody>
+          <a:bodyPr rtlCol="0" anchor="ctr"/>
+          <a:p>
+            <a:pPr algn="ctr"/>
+            <a:endParaRPr lang="zh-CN" altLang="en-US"/>
+          </a:p>
+        </p:txBody>
+      </p:sp>
+    </p:spTree>
+  </p:cSld>
+  <p:clrMapOvr>
+    <a:masterClrMapping/>
+  </p:clrMapOvr>
+</p:sld>
+</file>
+
+<file path=ppt/slides/slide9.xml><?xml version="1.0" encoding="utf-8"?>
+<p:sld xmlns:a="http://schemas.openxmlformats.org/drawingml/2006/main" xmlns:r="http://schemas.openxmlformats.org/officeDocument/2006/relationships" xmlns:p="http://schemas.openxmlformats.org/presentationml/2006/main">
+  <p:cSld>
+    <p:spTree>
+      <p:nvGrpSpPr>
+        <p:cNvPr id="1" name=""/>
+        <p:cNvGrpSpPr/>
+        <p:nvPr/>
+      </p:nvGrpSpPr>
+      <p:grpSpPr/>
+      <p:sp>
+        <p:nvSpPr>
+          <p:cNvPr id="2" name="标题 1"/>
+          <p:cNvSpPr>
+            <a:spLocks noGrp="1"/>
+          </p:cNvSpPr>
+          <p:nvPr>
+            <p:ph type="ctrTitle"/>
+          </p:nvPr>
+        </p:nvSpPr>
+        <p:spPr/>
+        <p:txBody>
+          <a:bodyPr/>
+          <a:p>
+            <a:r>
+              <a:rPr lang="en-US" altLang="zh-CN"/>
+              <a:t>Insruct</a:t>
+            </a:r>
+            <a:r>
+              <a:rPr lang="en-US" altLang="zh-CN"/>
+              <a:t>GPT</a:t>
+            </a:r>
+            <a:endParaRPr lang="en-US" altLang="zh-CN"/>
+          </a:p>
+        </p:txBody>
+      </p:sp>
+      <p:sp>
+        <p:nvSpPr>
+          <p:cNvPr id="3" name="副标题 2"/>
+          <p:cNvSpPr>
+            <a:spLocks noGrp="1"/>
+          </p:cNvSpPr>
+          <p:nvPr>
+            <p:ph type="subTitle" idx="1"/>
+          </p:nvPr>
+        </p:nvSpPr>
+        <p:spPr/>
+        <p:txBody>
+          <a:bodyPr/>
+          <a:p>
+            <a:endParaRPr lang="zh-CN" altLang="en-US"/>
+          </a:p>
+        </p:txBody>
+      </p:sp>
+    </p:spTree>
+  </p:cSld>
+  <p:clrMapOvr>
+    <a:masterClrMapping/>
+  </p:clrMapOvr>
+</p:sld>
+</file>
+
 <file path=ppt/tags/tag1.xml><?xml version="1.0" encoding="utf-8"?>
 <p:tagLst xmlns:p="http://schemas.openxmlformats.org/presentationml/2006/main">
   <p:tag name="KSO_WM_BEAUTIFY_FLAG" val=""/>
@@ -7033,25 +9886,277 @@
 </p:tagLst>
 </file>
 
+<file path=ppt/tags/tag50.xml><?xml version="1.0" encoding="utf-8"?>
+<p:tagLst xmlns:p="http://schemas.openxmlformats.org/presentationml/2006/main">
+  <p:tag name="KSO_WM_BEAUTIFY_FLAG" val=""/>
+</p:tagLst>
+</file>
+
+<file path=ppt/tags/tag51.xml><?xml version="1.0" encoding="utf-8"?>
+<p:tagLst xmlns:p="http://schemas.openxmlformats.org/presentationml/2006/main">
+  <p:tag name="KSO_WM_BEAUTIFY_FLAG" val=""/>
+</p:tagLst>
+</file>
+
+<file path=ppt/tags/tag52.xml><?xml version="1.0" encoding="utf-8"?>
+<p:tagLst xmlns:p="http://schemas.openxmlformats.org/presentationml/2006/main">
+  <p:tag name="KSO_WM_BEAUTIFY_FLAG" val=""/>
+</p:tagLst>
+</file>
+
+<file path=ppt/tags/tag53.xml><?xml version="1.0" encoding="utf-8"?>
+<p:tagLst xmlns:p="http://schemas.openxmlformats.org/presentationml/2006/main">
+  <p:tag name="KSO_WM_BEAUTIFY_FLAG" val=""/>
+</p:tagLst>
+</file>
+
+<file path=ppt/tags/tag54.xml><?xml version="1.0" encoding="utf-8"?>
+<p:tagLst xmlns:p="http://schemas.openxmlformats.org/presentationml/2006/main">
+  <p:tag name="KSO_WM_BEAUTIFY_FLAG" val=""/>
+</p:tagLst>
+</file>
+
+<file path=ppt/tags/tag55.xml><?xml version="1.0" encoding="utf-8"?>
+<p:tagLst xmlns:p="http://schemas.openxmlformats.org/presentationml/2006/main">
+  <p:tag name="KSO_WM_BEAUTIFY_FLAG" val=""/>
+</p:tagLst>
+</file>
+
+<file path=ppt/tags/tag56.xml><?xml version="1.0" encoding="utf-8"?>
+<p:tagLst xmlns:p="http://schemas.openxmlformats.org/presentationml/2006/main">
+  <p:tag name="KSO_WM_BEAUTIFY_FLAG" val=""/>
+</p:tagLst>
+</file>
+
+<file path=ppt/tags/tag57.xml><?xml version="1.0" encoding="utf-8"?>
+<p:tagLst xmlns:p="http://schemas.openxmlformats.org/presentationml/2006/main">
+  <p:tag name="KSO_WM_BEAUTIFY_FLAG" val=""/>
+</p:tagLst>
+</file>
+
+<file path=ppt/tags/tag58.xml><?xml version="1.0" encoding="utf-8"?>
+<p:tagLst xmlns:p="http://schemas.openxmlformats.org/presentationml/2006/main">
+  <p:tag name="KSO_WM_BEAUTIFY_FLAG" val=""/>
+</p:tagLst>
+</file>
+
+<file path=ppt/tags/tag59.xml><?xml version="1.0" encoding="utf-8"?>
+<p:tagLst xmlns:p="http://schemas.openxmlformats.org/presentationml/2006/main">
+  <p:tag name="KSO_WM_BEAUTIFY_FLAG" val=""/>
+</p:tagLst>
+</file>
+
 <file path=ppt/tags/tag6.xml><?xml version="1.0" encoding="utf-8"?>
 <p:tagLst xmlns:p="http://schemas.openxmlformats.org/presentationml/2006/main">
   <p:tag name="KSO_WM_BEAUTIFY_FLAG" val=""/>
 </p:tagLst>
 </file>
 
+<file path=ppt/tags/tag60.xml><?xml version="1.0" encoding="utf-8"?>
+<p:tagLst xmlns:p="http://schemas.openxmlformats.org/presentationml/2006/main">
+  <p:tag name="KSO_WM_BEAUTIFY_FLAG" val=""/>
+</p:tagLst>
+</file>
+
+<file path=ppt/tags/tag61.xml><?xml version="1.0" encoding="utf-8"?>
+<p:tagLst xmlns:p="http://schemas.openxmlformats.org/presentationml/2006/main">
+  <p:tag name="KSO_WM_BEAUTIFY_FLAG" val=""/>
+</p:tagLst>
+</file>
+
+<file path=ppt/tags/tag62.xml><?xml version="1.0" encoding="utf-8"?>
+<p:tagLst xmlns:p="http://schemas.openxmlformats.org/presentationml/2006/main">
+  <p:tag name="KSO_WM_BEAUTIFY_FLAG" val=""/>
+</p:tagLst>
+</file>
+
+<file path=ppt/tags/tag63.xml><?xml version="1.0" encoding="utf-8"?>
+<p:tagLst xmlns:p="http://schemas.openxmlformats.org/presentationml/2006/main">
+  <p:tag name="KSO_WM_BEAUTIFY_FLAG" val=""/>
+</p:tagLst>
+</file>
+
+<file path=ppt/tags/tag64.xml><?xml version="1.0" encoding="utf-8"?>
+<p:tagLst xmlns:p="http://schemas.openxmlformats.org/presentationml/2006/main">
+  <p:tag name="KSO_WM_BEAUTIFY_FLAG" val=""/>
+</p:tagLst>
+</file>
+
+<file path=ppt/tags/tag65.xml><?xml version="1.0" encoding="utf-8"?>
+<p:tagLst xmlns:p="http://schemas.openxmlformats.org/presentationml/2006/main">
+  <p:tag name="KSO_WM_BEAUTIFY_FLAG" val=""/>
+</p:tagLst>
+</file>
+
+<file path=ppt/tags/tag66.xml><?xml version="1.0" encoding="utf-8"?>
+<p:tagLst xmlns:p="http://schemas.openxmlformats.org/presentationml/2006/main">
+  <p:tag name="KSO_WM_BEAUTIFY_FLAG" val=""/>
+</p:tagLst>
+</file>
+
+<file path=ppt/tags/tag67.xml><?xml version="1.0" encoding="utf-8"?>
+<p:tagLst xmlns:p="http://schemas.openxmlformats.org/presentationml/2006/main">
+  <p:tag name="KSO_WM_BEAUTIFY_FLAG" val=""/>
+</p:tagLst>
+</file>
+
+<file path=ppt/tags/tag68.xml><?xml version="1.0" encoding="utf-8"?>
+<p:tagLst xmlns:p="http://schemas.openxmlformats.org/presentationml/2006/main">
+  <p:tag name="KSO_WM_BEAUTIFY_FLAG" val=""/>
+</p:tagLst>
+</file>
+
+<file path=ppt/tags/tag69.xml><?xml version="1.0" encoding="utf-8"?>
+<p:tagLst xmlns:p="http://schemas.openxmlformats.org/presentationml/2006/main">
+  <p:tag name="KSO_WM_BEAUTIFY_FLAG" val=""/>
+</p:tagLst>
+</file>
+
 <file path=ppt/tags/tag7.xml><?xml version="1.0" encoding="utf-8"?>
 <p:tagLst xmlns:p="http://schemas.openxmlformats.org/presentationml/2006/main">
   <p:tag name="KSO_WM_BEAUTIFY_FLAG" val=""/>
 </p:tagLst>
 </file>
 
+<file path=ppt/tags/tag70.xml><?xml version="1.0" encoding="utf-8"?>
+<p:tagLst xmlns:p="http://schemas.openxmlformats.org/presentationml/2006/main">
+  <p:tag name="KSO_WM_BEAUTIFY_FLAG" val=""/>
+</p:tagLst>
+</file>
+
+<file path=ppt/tags/tag71.xml><?xml version="1.0" encoding="utf-8"?>
+<p:tagLst xmlns:p="http://schemas.openxmlformats.org/presentationml/2006/main">
+  <p:tag name="KSO_WM_BEAUTIFY_FLAG" val=""/>
+</p:tagLst>
+</file>
+
+<file path=ppt/tags/tag72.xml><?xml version="1.0" encoding="utf-8"?>
+<p:tagLst xmlns:p="http://schemas.openxmlformats.org/presentationml/2006/main">
+  <p:tag name="KSO_WM_BEAUTIFY_FLAG" val=""/>
+</p:tagLst>
+</file>
+
+<file path=ppt/tags/tag73.xml><?xml version="1.0" encoding="utf-8"?>
+<p:tagLst xmlns:p="http://schemas.openxmlformats.org/presentationml/2006/main">
+  <p:tag name="KSO_WM_BEAUTIFY_FLAG" val=""/>
+</p:tagLst>
+</file>
+
+<file path=ppt/tags/tag74.xml><?xml version="1.0" encoding="utf-8"?>
+<p:tagLst xmlns:p="http://schemas.openxmlformats.org/presentationml/2006/main">
+  <p:tag name="KSO_WM_BEAUTIFY_FLAG" val=""/>
+</p:tagLst>
+</file>
+
+<file path=ppt/tags/tag75.xml><?xml version="1.0" encoding="utf-8"?>
+<p:tagLst xmlns:p="http://schemas.openxmlformats.org/presentationml/2006/main">
+  <p:tag name="KSO_WM_BEAUTIFY_FLAG" val=""/>
+</p:tagLst>
+</file>
+
+<file path=ppt/tags/tag76.xml><?xml version="1.0" encoding="utf-8"?>
+<p:tagLst xmlns:p="http://schemas.openxmlformats.org/presentationml/2006/main">
+  <p:tag name="KSO_WM_BEAUTIFY_FLAG" val=""/>
+</p:tagLst>
+</file>
+
+<file path=ppt/tags/tag77.xml><?xml version="1.0" encoding="utf-8"?>
+<p:tagLst xmlns:p="http://schemas.openxmlformats.org/presentationml/2006/main">
+  <p:tag name="KSO_WM_BEAUTIFY_FLAG" val=""/>
+</p:tagLst>
+</file>
+
+<file path=ppt/tags/tag78.xml><?xml version="1.0" encoding="utf-8"?>
+<p:tagLst xmlns:p="http://schemas.openxmlformats.org/presentationml/2006/main">
+  <p:tag name="KSO_WM_BEAUTIFY_FLAG" val=""/>
+</p:tagLst>
+</file>
+
+<file path=ppt/tags/tag79.xml><?xml version="1.0" encoding="utf-8"?>
+<p:tagLst xmlns:p="http://schemas.openxmlformats.org/presentationml/2006/main">
+  <p:tag name="KSO_WM_BEAUTIFY_FLAG" val=""/>
+</p:tagLst>
+</file>
+
 <file path=ppt/tags/tag8.xml><?xml version="1.0" encoding="utf-8"?>
 <p:tagLst xmlns:p="http://schemas.openxmlformats.org/presentationml/2006/main">
   <p:tag name="KSO_WM_BEAUTIFY_FLAG" val=""/>
 </p:tagLst>
 </file>
 
+<file path=ppt/tags/tag80.xml><?xml version="1.0" encoding="utf-8"?>
+<p:tagLst xmlns:p="http://schemas.openxmlformats.org/presentationml/2006/main">
+  <p:tag name="KSO_WM_BEAUTIFY_FLAG" val=""/>
+</p:tagLst>
+</file>
+
+<file path=ppt/tags/tag81.xml><?xml version="1.0" encoding="utf-8"?>
+<p:tagLst xmlns:p="http://schemas.openxmlformats.org/presentationml/2006/main">
+  <p:tag name="KSO_WM_BEAUTIFY_FLAG" val=""/>
+</p:tagLst>
+</file>
+
+<file path=ppt/tags/tag82.xml><?xml version="1.0" encoding="utf-8"?>
+<p:tagLst xmlns:p="http://schemas.openxmlformats.org/presentationml/2006/main">
+  <p:tag name="KSO_WM_BEAUTIFY_FLAG" val=""/>
+</p:tagLst>
+</file>
+
+<file path=ppt/tags/tag83.xml><?xml version="1.0" encoding="utf-8"?>
+<p:tagLst xmlns:p="http://schemas.openxmlformats.org/presentationml/2006/main">
+  <p:tag name="KSO_WM_BEAUTIFY_FLAG" val=""/>
+</p:tagLst>
+</file>
+
+<file path=ppt/tags/tag84.xml><?xml version="1.0" encoding="utf-8"?>
+<p:tagLst xmlns:p="http://schemas.openxmlformats.org/presentationml/2006/main">
+  <p:tag name="KSO_WM_BEAUTIFY_FLAG" val=""/>
+</p:tagLst>
+</file>
+
+<file path=ppt/tags/tag85.xml><?xml version="1.0" encoding="utf-8"?>
+<p:tagLst xmlns:p="http://schemas.openxmlformats.org/presentationml/2006/main">
+  <p:tag name="KSO_WM_BEAUTIFY_FLAG" val=""/>
+</p:tagLst>
+</file>
+
+<file path=ppt/tags/tag86.xml><?xml version="1.0" encoding="utf-8"?>
+<p:tagLst xmlns:p="http://schemas.openxmlformats.org/presentationml/2006/main">
+  <p:tag name="KSO_WM_BEAUTIFY_FLAG" val=""/>
+</p:tagLst>
+</file>
+
+<file path=ppt/tags/tag87.xml><?xml version="1.0" encoding="utf-8"?>
+<p:tagLst xmlns:p="http://schemas.openxmlformats.org/presentationml/2006/main">
+  <p:tag name="KSO_WM_BEAUTIFY_FLAG" val=""/>
+</p:tagLst>
+</file>
+
+<file path=ppt/tags/tag88.xml><?xml version="1.0" encoding="utf-8"?>
+<p:tagLst xmlns:p="http://schemas.openxmlformats.org/presentationml/2006/main">
+  <p:tag name="KSO_WM_BEAUTIFY_FLAG" val=""/>
+</p:tagLst>
+</file>
+
+<file path=ppt/tags/tag89.xml><?xml version="1.0" encoding="utf-8"?>
+<p:tagLst xmlns:p="http://schemas.openxmlformats.org/presentationml/2006/main">
+  <p:tag name="KSO_WM_BEAUTIFY_FLAG" val=""/>
+</p:tagLst>
+</file>
+
 <file path=ppt/tags/tag9.xml><?xml version="1.0" encoding="utf-8"?>
+<p:tagLst xmlns:p="http://schemas.openxmlformats.org/presentationml/2006/main">
+  <p:tag name="KSO_WM_BEAUTIFY_FLAG" val=""/>
+</p:tagLst>
+</file>
+
+<file path=ppt/tags/tag90.xml><?xml version="1.0" encoding="utf-8"?>
+<p:tagLst xmlns:p="http://schemas.openxmlformats.org/presentationml/2006/main">
+  <p:tag name="KSO_WM_BEAUTIFY_FLAG" val=""/>
+</p:tagLst>
+</file>
+
+<file path=ppt/tags/tag91.xml><?xml version="1.0" encoding="utf-8"?>
 <p:tagLst xmlns:p="http://schemas.openxmlformats.org/presentationml/2006/main">
   <p:tag name="KSO_WM_BEAUTIFY_FLAG" val=""/>
 </p:tagLst>
